--- a/Navratri_Infographic.pptx
+++ b/Navratri_Infographic.pptx
@@ -3088,61 +3088,9 @@
         <p:nvPr/>
       </p:nvGrpSpPr>
       <p:grpSpPr/>
-      <p:sp>
-        <p:nvSpPr>
-          <p:cNvPr id="2" name="Background"/>
-          <p:cNvSpPr/>
-          <p:nvPr/>
-        </p:nvSpPr>
-        <p:spPr>
-          <a:xfrm>
-            <a:off x="0" y="0"/>
-            <a:ext cx="10687050" cy="13354050"/>
-          </a:xfrm>
-          <a:prstGeom prst="rect">
-            <a:avLst/>
-          </a:prstGeom>
-          <a:gradFill rotWithShape="1">
-            <a:gsLst>
-              <a:gs pos="0">
-                <a:srgbClr val="6E1220"/>
-              </a:gs>
-              <a:gs pos="100000">
-                <a:srgbClr val="4A0710"/>
-              </a:gs>
-            </a:gsLst>
-            <a:lin scaled="0" ang="16200000"/>
-          </a:gradFill>
-          <a:ln>
-            <a:noFill/>
-          </a:ln>
-          <a:effectLst/>
-        </p:spPr>
-        <p:style>
-          <a:lnRef idx="1">
-            <a:schemeClr val="accent1"/>
-          </a:lnRef>
-          <a:fillRef idx="3">
-            <a:schemeClr val="accent1"/>
-          </a:fillRef>
-          <a:effectRef idx="2">
-            <a:schemeClr val="accent1"/>
-          </a:effectRef>
-          <a:fontRef idx="minor">
-            <a:schemeClr val="lt1"/>
-          </a:fontRef>
-        </p:style>
-        <p:txBody>
-          <a:bodyPr rtlCol="0" anchor="ctr"/>
-          <a:lstStyle/>
-          <a:p>
-            <a:pPr algn="ctr"/>
-          </a:p>
-        </p:txBody>
-      </p:sp>
       <p:pic>
         <p:nvPicPr>
-          <p:cNvPr id="3" name="Mandala bottom left" descr="mandala_bl.png"/>
+          <p:cNvPr id="2" name="Background" descr="info_bg.png"/>
           <p:cNvPicPr>
             <a:picLocks noChangeAspect="1"/>
           </p:cNvPicPr>
@@ -3156,8 +3104,8 @@
         </p:blipFill>
         <p:spPr>
           <a:xfrm>
-            <a:off x="0" y="10972800"/>
-            <a:ext cx="2381250" cy="2381250"/>
+            <a:off x="0" y="0"/>
+            <a:ext cx="10687050" cy="13354050"/>
           </a:xfrm>
           <a:prstGeom prst="rect">
             <a:avLst/>
@@ -3166,7 +3114,7 @@
       </p:pic>
       <p:pic>
         <p:nvPicPr>
-          <p:cNvPr id="4" name="Mandala bottom right" descr="mandala_br.png"/>
+          <p:cNvPr id="3" name="Side ornament left" descr="side_line_L.png"/>
           <p:cNvPicPr>
             <a:picLocks noChangeAspect="1"/>
           </p:cNvPicPr>
@@ -3180,8 +3128,8 @@
         </p:blipFill>
         <p:spPr>
           <a:xfrm>
-            <a:off x="8305800" y="10972800"/>
-            <a:ext cx="2381250" cy="2381250"/>
+            <a:off x="190500" y="2667000"/>
+            <a:ext cx="228600" cy="6772275"/>
           </a:xfrm>
           <a:prstGeom prst="rect">
             <a:avLst/>
@@ -3190,7 +3138,7 @@
       </p:pic>
       <p:pic>
         <p:nvPicPr>
-          <p:cNvPr id="5" name="Corner filigree left" descr="arch_tl.png"/>
+          <p:cNvPr id="4" name="Side ornament right" descr="side_line_R.png"/>
           <p:cNvPicPr>
             <a:picLocks noChangeAspect="1"/>
           </p:cNvPicPr>
@@ -3204,8 +3152,8 @@
         </p:blipFill>
         <p:spPr>
           <a:xfrm>
-            <a:off x="0" y="0"/>
-            <a:ext cx="2476500" cy="2095500"/>
+            <a:off x="10267950" y="2667000"/>
+            <a:ext cx="238125" cy="6800850"/>
           </a:xfrm>
           <a:prstGeom prst="rect">
             <a:avLst/>
@@ -3214,7 +3162,7 @@
       </p:pic>
       <p:pic>
         <p:nvPicPr>
-          <p:cNvPr id="6" name="Corner filigree right" descr="arch_tr.png"/>
+          <p:cNvPr id="5" name="Mandala bottom left" descr="mandala_BL.png"/>
           <p:cNvPicPr>
             <a:picLocks noChangeAspect="1"/>
           </p:cNvPicPr>
@@ -3228,8 +3176,8 @@
         </p:blipFill>
         <p:spPr>
           <a:xfrm>
-            <a:off x="8210550" y="0"/>
-            <a:ext cx="2476500" cy="2095500"/>
+            <a:off x="0" y="10934700"/>
+            <a:ext cx="2038350" cy="2419350"/>
           </a:xfrm>
           <a:prstGeom prst="rect">
             <a:avLst/>
@@ -3238,7 +3186,7 @@
       </p:pic>
       <p:pic>
         <p:nvPicPr>
-          <p:cNvPr id="7" name="Hanging diya chain L1" descr="chain.png"/>
+          <p:cNvPr id="6" name="Mandala bottom right" descr="mandala_BR.png"/>
           <p:cNvPicPr>
             <a:picLocks noChangeAspect="1"/>
           </p:cNvPicPr>
@@ -3252,8 +3200,8 @@
         </p:blipFill>
         <p:spPr>
           <a:xfrm>
-            <a:off x="590550" y="0"/>
-            <a:ext cx="381000" cy="2857500"/>
+            <a:off x="8324850" y="10934700"/>
+            <a:ext cx="2362200" cy="2419350"/>
           </a:xfrm>
           <a:prstGeom prst="rect">
             <a:avLst/>
@@ -3262,79 +3210,7 @@
       </p:pic>
       <p:pic>
         <p:nvPicPr>
-          <p:cNvPr id="8" name="Hanging diya chain L2" descr="chain.png"/>
-          <p:cNvPicPr>
-            <a:picLocks noChangeAspect="1"/>
-          </p:cNvPicPr>
-          <p:nvPr/>
-        </p:nvPicPr>
-        <p:blipFill>
-          <a:blip r:embed="rId6"/>
-          <a:stretch>
-            <a:fillRect/>
-          </a:stretch>
-        </p:blipFill>
-        <p:spPr>
-          <a:xfrm>
-            <a:off x="1352550" y="0"/>
-            <a:ext cx="381000" cy="2857500"/>
-          </a:xfrm>
-          <a:prstGeom prst="rect">
-            <a:avLst/>
-          </a:prstGeom>
-        </p:spPr>
-      </p:pic>
-      <p:pic>
-        <p:nvPicPr>
-          <p:cNvPr id="9" name="Hanging diya chain R1" descr="chain.png"/>
-          <p:cNvPicPr>
-            <a:picLocks noChangeAspect="1"/>
-          </p:cNvPicPr>
-          <p:nvPr/>
-        </p:nvPicPr>
-        <p:blipFill>
-          <a:blip r:embed="rId6"/>
-          <a:stretch>
-            <a:fillRect/>
-          </a:stretch>
-        </p:blipFill>
-        <p:spPr>
-          <a:xfrm>
-            <a:off x="9715500" y="0"/>
-            <a:ext cx="381000" cy="2857500"/>
-          </a:xfrm>
-          <a:prstGeom prst="rect">
-            <a:avLst/>
-          </a:prstGeom>
-        </p:spPr>
-      </p:pic>
-      <p:pic>
-        <p:nvPicPr>
-          <p:cNvPr id="10" name="Hanging diya chain R2" descr="chain.png"/>
-          <p:cNvPicPr>
-            <a:picLocks noChangeAspect="1"/>
-          </p:cNvPicPr>
-          <p:nvPr/>
-        </p:nvPicPr>
-        <p:blipFill>
-          <a:blip r:embed="rId6"/>
-          <a:stretch>
-            <a:fillRect/>
-          </a:stretch>
-        </p:blipFill>
-        <p:spPr>
-          <a:xfrm>
-            <a:off x="8953500" y="0"/>
-            <a:ext cx="381000" cy="2857500"/>
-          </a:xfrm>
-          <a:prstGeom prst="rect">
-            <a:avLst/>
-          </a:prstGeom>
-        </p:spPr>
-      </p:pic>
-      <p:pic>
-        <p:nvPicPr>
-          <p:cNvPr id="11" name="Star left" descr="star.png"/>
+          <p:cNvPr id="7" name="Arch filigree top left" descr="arch_TL.png"/>
           <p:cNvPicPr>
             <a:picLocks noChangeAspect="1"/>
           </p:cNvPicPr>
@@ -3348,8 +3224,8 @@
         </p:blipFill>
         <p:spPr>
           <a:xfrm>
-            <a:off x="628650" y="323850"/>
-            <a:ext cx="228600" cy="228600"/>
+            <a:off x="1828800" y="0"/>
+            <a:ext cx="1314450" cy="1533525"/>
           </a:xfrm>
           <a:prstGeom prst="rect">
             <a:avLst/>
@@ -3358,31 +3234,7 @@
       </p:pic>
       <p:pic>
         <p:nvPicPr>
-          <p:cNvPr id="12" name="Star right" descr="star.png"/>
-          <p:cNvPicPr>
-            <a:picLocks noChangeAspect="1"/>
-          </p:cNvPicPr>
-          <p:nvPr/>
-        </p:nvPicPr>
-        <p:blipFill>
-          <a:blip r:embed="rId7"/>
-          <a:stretch>
-            <a:fillRect/>
-          </a:stretch>
-        </p:blipFill>
-        <p:spPr>
-          <a:xfrm>
-            <a:off x="9829800" y="323850"/>
-            <a:ext cx="228600" cy="228600"/>
-          </a:xfrm>
-          <a:prstGeom prst="rect">
-            <a:avLst/>
-          </a:prstGeom>
-        </p:spPr>
-      </p:pic>
-      <p:pic>
-        <p:nvPicPr>
-          <p:cNvPr id="13" name="Durga eyes emblem" descr="eyes.png"/>
+          <p:cNvPr id="8" name="Arch filigree top right" descr="arch_TR.png"/>
           <p:cNvPicPr>
             <a:picLocks noChangeAspect="1"/>
           </p:cNvPicPr>
@@ -3396,95 +3248,17 @@
         </p:blipFill>
         <p:spPr>
           <a:xfrm>
-            <a:off x="3819525" y="381000"/>
-            <a:ext cx="3048000" cy="1619250"/>
+            <a:off x="7543800" y="0"/>
+            <a:ext cx="1295400" cy="1533525"/>
           </a:xfrm>
           <a:prstGeom prst="rect">
             <a:avLst/>
           </a:prstGeom>
         </p:spPr>
       </p:pic>
-      <p:sp>
-        <p:nvSpPr>
-          <p:cNvPr id="14" name="Title"/>
-          <p:cNvSpPr txBox="1"/>
-          <p:nvPr/>
-        </p:nvSpPr>
-        <p:spPr>
-          <a:xfrm>
-            <a:off x="1533525" y="1905000"/>
-            <a:ext cx="7620000" cy="1238250"/>
-          </a:xfrm>
-          <a:prstGeom prst="rect">
-            <a:avLst/>
-          </a:prstGeom>
-          <a:noFill/>
-        </p:spPr>
-        <p:txBody>
-          <a:bodyPr wrap="square" lIns="0" rIns="0" tIns="0" bIns="0" anchor="t">
-            <a:spAutoFit/>
-          </a:bodyPr>
-          <a:lstStyle/>
-          <a:p>
-            <a:pPr algn="ctr">
-              <a:lnSpc>
-                <a:spcPct val="100000"/>
-              </a:lnSpc>
-            </a:pPr>
-            <a:r>
-              <a:rPr sz="9000" b="1" spc="-200">
-                <a:solidFill>
-                  <a:srgbClr val="F2DFA7"/>
-                </a:solidFill>
-                <a:latin typeface="Playfair Display"/>
-              </a:rPr>
-              <a:t>Navratri</a:t>
-            </a:r>
-          </a:p>
-        </p:txBody>
-      </p:sp>
-      <p:sp>
-        <p:nvSpPr>
-          <p:cNvPr id="15" name="Subtitle"/>
-          <p:cNvSpPr txBox="1"/>
-          <p:nvPr/>
-        </p:nvSpPr>
-        <p:spPr>
-          <a:xfrm>
-            <a:off x="1533525" y="3238500"/>
-            <a:ext cx="7620000" cy="342900"/>
-          </a:xfrm>
-          <a:prstGeom prst="rect">
-            <a:avLst/>
-          </a:prstGeom>
-          <a:noFill/>
-        </p:spPr>
-        <p:txBody>
-          <a:bodyPr wrap="square" lIns="0" rIns="0" tIns="0" bIns="0" anchor="t">
-            <a:spAutoFit/>
-          </a:bodyPr>
-          <a:lstStyle/>
-          <a:p>
-            <a:pPr algn="ctr">
-              <a:lnSpc>
-                <a:spcPct val="115000"/>
-              </a:lnSpc>
-            </a:pPr>
-            <a:r>
-              <a:rPr sz="1800" b="0" spc="700">
-                <a:solidFill>
-                  <a:srgbClr val="F2DFA7"/>
-                </a:solidFill>
-                <a:latin typeface="Open Sans"/>
-              </a:rPr>
-              <a:t>NINE NIGHTS OF DIVINE POWER</a:t>
-            </a:r>
-          </a:p>
-        </p:txBody>
-      </p:sp>
       <p:pic>
         <p:nvPicPr>
-          <p:cNvPr id="16" name="Divider lotus" descr="orn_lotus.png"/>
+          <p:cNvPr id="9" name="Star top left" descr="star_TL.png"/>
           <p:cNvPicPr>
             <a:picLocks noChangeAspect="1"/>
           </p:cNvPicPr>
@@ -3498,8 +3272,8 @@
         </p:blipFill>
         <p:spPr>
           <a:xfrm>
-            <a:off x="5133975" y="3562350"/>
-            <a:ext cx="419100" cy="285750"/>
+            <a:off x="0" y="161925"/>
+            <a:ext cx="457200" cy="390525"/>
           </a:xfrm>
           <a:prstGeom prst="rect">
             <a:avLst/>
@@ -3508,469 +3282,7 @@
       </p:pic>
       <p:pic>
         <p:nvPicPr>
-          <p:cNvPr id="17" name="Side lotus left" descr="orn_lotus.png"/>
-          <p:cNvPicPr>
-            <a:picLocks noChangeAspect="1"/>
-          </p:cNvPicPr>
-          <p:nvPr/>
-        </p:nvPicPr>
-        <p:blipFill>
-          <a:blip r:embed="rId9"/>
-          <a:stretch>
-            <a:fillRect/>
-          </a:stretch>
-        </p:blipFill>
-        <p:spPr>
-          <a:xfrm>
-            <a:off x="781050" y="4248150"/>
-            <a:ext cx="419100" cy="285750"/>
-          </a:xfrm>
-          <a:prstGeom prst="rect">
-            <a:avLst/>
-          </a:prstGeom>
-        </p:spPr>
-      </p:pic>
-      <p:pic>
-        <p:nvPicPr>
-          <p:cNvPr id="18" name="Side lotus right" descr="orn_lotus.png"/>
-          <p:cNvPicPr>
-            <a:picLocks noChangeAspect="1"/>
-          </p:cNvPicPr>
-          <p:nvPr/>
-        </p:nvPicPr>
-        <p:blipFill>
-          <a:blip r:embed="rId9"/>
-          <a:stretch>
-            <a:fillRect/>
-          </a:stretch>
-        </p:blipFill>
-        <p:spPr>
-          <a:xfrm>
-            <a:off x="9486900" y="4248150"/>
-            <a:ext cx="419100" cy="285750"/>
-          </a:xfrm>
-          <a:prstGeom prst="rect">
-            <a:avLst/>
-          </a:prstGeom>
-        </p:spPr>
-      </p:pic>
-      <p:sp>
-        <p:nvSpPr>
-          <p:cNvPr id="19" name="Intro paragraph"/>
-          <p:cNvSpPr txBox="1"/>
-          <p:nvPr/>
-        </p:nvSpPr>
-        <p:spPr>
-          <a:xfrm>
-            <a:off x="1438275" y="3810000"/>
-            <a:ext cx="7810500" cy="1143000"/>
-          </a:xfrm>
-          <a:prstGeom prst="rect">
-            <a:avLst/>
-          </a:prstGeom>
-          <a:noFill/>
-        </p:spPr>
-        <p:txBody>
-          <a:bodyPr wrap="square" lIns="0" rIns="0" tIns="0" bIns="0" anchor="t">
-            <a:spAutoFit/>
-          </a:bodyPr>
-          <a:lstStyle/>
-          <a:p>
-            <a:pPr algn="ctr">
-              <a:lnSpc>
-                <a:spcPct val="120000"/>
-              </a:lnSpc>
-            </a:pPr>
-            <a:r>
-              <a:rPr sz="2250" b="1">
-                <a:solidFill>
-                  <a:srgbClr val="F2DFA7"/>
-                </a:solidFill>
-                <a:latin typeface="Playfair Display"/>
-              </a:rPr>
-              <a:t>Navratri is a Hindu festival dedicated to the worship of Goddess Durga. It symbolizes devotion, self-reflection, and the victory of good over evil.</a:t>
-            </a:r>
-          </a:p>
-        </p:txBody>
-      </p:sp>
-      <p:sp>
-        <p:nvSpPr>
-          <p:cNvPr id="20" name="Nine forms outer box"/>
-          <p:cNvSpPr/>
-          <p:nvPr/>
-        </p:nvSpPr>
-        <p:spPr>
-          <a:xfrm>
-            <a:off x="428625" y="5410200"/>
-            <a:ext cx="9829800" cy="4248150"/>
-          </a:xfrm>
-          <a:prstGeom prst="roundRect">
-            <a:avLst>
-              <a:gd name="adj" fmla="val 6000"/>
-            </a:avLst>
-          </a:prstGeom>
-          <a:noFill/>
-          <a:ln w="19050">
-            <a:solidFill>
-              <a:srgbClr val="D9A64A"/>
-            </a:solidFill>
-          </a:ln>
-          <a:effectLst/>
-        </p:spPr>
-        <p:style>
-          <a:lnRef idx="1">
-            <a:schemeClr val="accent1"/>
-          </a:lnRef>
-          <a:fillRef idx="3">
-            <a:schemeClr val="accent1"/>
-          </a:fillRef>
-          <a:effectRef idx="2">
-            <a:schemeClr val="accent1"/>
-          </a:effectRef>
-          <a:fontRef idx="minor">
-            <a:schemeClr val="lt1"/>
-          </a:fontRef>
-        </p:style>
-        <p:txBody>
-          <a:bodyPr rtlCol="0" anchor="ctr"/>
-          <a:lstStyle/>
-          <a:p>
-            <a:pPr algn="ctr"/>
-          </a:p>
-        </p:txBody>
-      </p:sp>
-      <p:sp>
-        <p:nvSpPr>
-          <p:cNvPr id="21" name="Nine forms inner box"/>
-          <p:cNvSpPr/>
-          <p:nvPr/>
-        </p:nvSpPr>
-        <p:spPr>
-          <a:xfrm>
-            <a:off x="495300" y="5476875"/>
-            <a:ext cx="9696450" cy="4114800"/>
-          </a:xfrm>
-          <a:prstGeom prst="roundRect">
-            <a:avLst>
-              <a:gd name="adj" fmla="val 6000"/>
-            </a:avLst>
-          </a:prstGeom>
-          <a:noFill/>
-          <a:ln w="6350">
-            <a:solidFill>
-              <a:srgbClr val="D9A64A"/>
-            </a:solidFill>
-          </a:ln>
-          <a:effectLst/>
-        </p:spPr>
-        <p:style>
-          <a:lnRef idx="1">
-            <a:schemeClr val="accent1"/>
-          </a:lnRef>
-          <a:fillRef idx="3">
-            <a:schemeClr val="accent1"/>
-          </a:fillRef>
-          <a:effectRef idx="2">
-            <a:schemeClr val="accent1"/>
-          </a:effectRef>
-          <a:fontRef idx="minor">
-            <a:schemeClr val="lt1"/>
-          </a:fontRef>
-        </p:style>
-        <p:txBody>
-          <a:bodyPr rtlCol="0" anchor="ctr"/>
-          <a:lstStyle/>
-          <a:p>
-            <a:pPr algn="ctr"/>
-          </a:p>
-        </p:txBody>
-      </p:sp>
-      <p:sp>
-        <p:nvSpPr>
-          <p:cNvPr id="22" name="Section banner"/>
-          <p:cNvSpPr/>
-          <p:nvPr/>
-        </p:nvSpPr>
-        <p:spPr>
-          <a:xfrm>
-            <a:off x="2047875" y="5048250"/>
-            <a:ext cx="6591300" cy="514350"/>
-          </a:xfrm>
-          <a:prstGeom prst="roundRect">
-            <a:avLst>
-              <a:gd name="adj" fmla="val 50000"/>
-            </a:avLst>
-          </a:prstGeom>
-          <a:gradFill rotWithShape="1">
-            <a:gsLst>
-              <a:gs pos="0">
-                <a:srgbClr val="F1D28A"/>
-              </a:gs>
-              <a:gs pos="100000">
-                <a:srgbClr val="D9A64A"/>
-              </a:gs>
-            </a:gsLst>
-            <a:lin scaled="0" ang="0"/>
-          </a:gradFill>
-          <a:ln w="12700">
-            <a:solidFill>
-              <a:srgbClr val="D9A64A"/>
-            </a:solidFill>
-          </a:ln>
-          <a:effectLst/>
-        </p:spPr>
-        <p:style>
-          <a:lnRef idx="1">
-            <a:schemeClr val="accent1"/>
-          </a:lnRef>
-          <a:fillRef idx="3">
-            <a:schemeClr val="accent1"/>
-          </a:fillRef>
-          <a:effectRef idx="2">
-            <a:schemeClr val="accent1"/>
-          </a:effectRef>
-          <a:fontRef idx="minor">
-            <a:schemeClr val="lt1"/>
-          </a:fontRef>
-        </p:style>
-        <p:txBody>
-          <a:bodyPr rtlCol="0" anchor="ctr"/>
-          <a:lstStyle/>
-          <a:p>
-            <a:pPr algn="ctr"/>
-          </a:p>
-        </p:txBody>
-      </p:sp>
-      <p:sp>
-        <p:nvSpPr>
-          <p:cNvPr id="23" name="Section title"/>
-          <p:cNvSpPr txBox="1"/>
-          <p:nvPr/>
-        </p:nvSpPr>
-        <p:spPr>
-          <a:xfrm>
-            <a:off x="2047875" y="5067300"/>
-            <a:ext cx="6591300" cy="476250"/>
-          </a:xfrm>
-          <a:prstGeom prst="rect">
-            <a:avLst/>
-          </a:prstGeom>
-          <a:noFill/>
-        </p:spPr>
-        <p:txBody>
-          <a:bodyPr wrap="square" lIns="0" rIns="0" tIns="0" bIns="0" anchor="ctr">
-            <a:spAutoFit/>
-          </a:bodyPr>
-          <a:lstStyle/>
-          <a:p>
-            <a:pPr algn="ctr">
-              <a:lnSpc>
-                <a:spcPct val="115000"/>
-              </a:lnSpc>
-            </a:pPr>
-            <a:r>
-              <a:rPr sz="2850" b="1">
-                <a:solidFill>
-                  <a:srgbClr val="4A0812"/>
-                </a:solidFill>
-                <a:latin typeface="Playfair Display"/>
-              </a:rPr>
-              <a:t>The Nine Forms of Navadurga</a:t>
-            </a:r>
-          </a:p>
-        </p:txBody>
-      </p:sp>
-      <p:pic>
-        <p:nvPicPr>
-          <p:cNvPr id="24" name="Banner lotus left" descr="orn_lotus.png"/>
-          <p:cNvPicPr>
-            <a:picLocks noChangeAspect="1"/>
-          </p:cNvPicPr>
-          <p:nvPr/>
-        </p:nvPicPr>
-        <p:blipFill>
-          <a:blip r:embed="rId9"/>
-          <a:stretch>
-            <a:fillRect/>
-          </a:stretch>
-        </p:blipFill>
-        <p:spPr>
-          <a:xfrm>
-            <a:off x="2286000" y="5181600"/>
-            <a:ext cx="285750" cy="194830"/>
-          </a:xfrm>
-          <a:prstGeom prst="rect">
-            <a:avLst/>
-          </a:prstGeom>
-        </p:spPr>
-      </p:pic>
-      <p:pic>
-        <p:nvPicPr>
-          <p:cNvPr id="25" name="Banner lotus right" descr="orn_lotus.png"/>
-          <p:cNvPicPr>
-            <a:picLocks noChangeAspect="1"/>
-          </p:cNvPicPr>
-          <p:nvPr/>
-        </p:nvPicPr>
-        <p:blipFill>
-          <a:blip r:embed="rId9"/>
-          <a:stretch>
-            <a:fillRect/>
-          </a:stretch>
-        </p:blipFill>
-        <p:spPr>
-          <a:xfrm>
-            <a:off x="8115300" y="5181600"/>
-            <a:ext cx="285750" cy="194830"/>
-          </a:xfrm>
-          <a:prstGeom prst="rect">
-            <a:avLst/>
-          </a:prstGeom>
-        </p:spPr>
-      </p:pic>
-      <p:cxnSp>
-        <p:nvCxnSpPr>
-          <p:cNvPr id="26" name="Grid column line 1"/>
-          <p:cNvCxnSpPr/>
-          <p:nvPr/>
-        </p:nvCxnSpPr>
-        <p:spPr>
-          <a:xfrm>
-            <a:off x="3886200" y="5572125"/>
-            <a:ext cx="0" cy="3952875"/>
-          </a:xfrm>
-          <a:prstGeom prst="line">
-            <a:avLst/>
-          </a:prstGeom>
-          <a:ln w="15875">
-            <a:solidFill>
-              <a:srgbClr val="D9A64A"/>
-            </a:solidFill>
-          </a:ln>
-        </p:spPr>
-        <p:style>
-          <a:lnRef idx="2">
-            <a:schemeClr val="accent1"/>
-          </a:lnRef>
-          <a:fillRef idx="0">
-            <a:schemeClr val="accent1"/>
-          </a:fillRef>
-          <a:effectRef idx="1">
-            <a:schemeClr val="accent1"/>
-          </a:effectRef>
-          <a:fontRef idx="minor">
-            <a:schemeClr val="tx1"/>
-          </a:fontRef>
-        </p:style>
-      </p:cxnSp>
-      <p:cxnSp>
-        <p:nvCxnSpPr>
-          <p:cNvPr id="27" name="Grid column line 2"/>
-          <p:cNvCxnSpPr/>
-          <p:nvPr/>
-        </p:nvCxnSpPr>
-        <p:spPr>
-          <a:xfrm>
-            <a:off x="7019925" y="5572125"/>
-            <a:ext cx="0" cy="3952875"/>
-          </a:xfrm>
-          <a:prstGeom prst="line">
-            <a:avLst/>
-          </a:prstGeom>
-          <a:ln w="15875">
-            <a:solidFill>
-              <a:srgbClr val="D9A64A"/>
-            </a:solidFill>
-          </a:ln>
-        </p:spPr>
-        <p:style>
-          <a:lnRef idx="2">
-            <a:schemeClr val="accent1"/>
-          </a:lnRef>
-          <a:fillRef idx="0">
-            <a:schemeClr val="accent1"/>
-          </a:fillRef>
-          <a:effectRef idx="1">
-            <a:schemeClr val="accent1"/>
-          </a:effectRef>
-          <a:fontRef idx="minor">
-            <a:schemeClr val="tx1"/>
-          </a:fontRef>
-        </p:style>
-      </p:cxnSp>
-      <p:cxnSp>
-        <p:nvCxnSpPr>
-          <p:cNvPr id="28" name="Grid row line 1"/>
-          <p:cNvCxnSpPr/>
-          <p:nvPr/>
-        </p:nvCxnSpPr>
-        <p:spPr>
-          <a:xfrm>
-            <a:off x="571500" y="7000875"/>
-            <a:ext cx="9544050" cy="0"/>
-          </a:xfrm>
-          <a:prstGeom prst="line">
-            <a:avLst/>
-          </a:prstGeom>
-          <a:ln w="15875">
-            <a:solidFill>
-              <a:srgbClr val="D9A64A"/>
-            </a:solidFill>
-          </a:ln>
-        </p:spPr>
-        <p:style>
-          <a:lnRef idx="2">
-            <a:schemeClr val="accent1"/>
-          </a:lnRef>
-          <a:fillRef idx="0">
-            <a:schemeClr val="accent1"/>
-          </a:fillRef>
-          <a:effectRef idx="1">
-            <a:schemeClr val="accent1"/>
-          </a:effectRef>
-          <a:fontRef idx="minor">
-            <a:schemeClr val="tx1"/>
-          </a:fontRef>
-        </p:style>
-      </p:cxnSp>
-      <p:cxnSp>
-        <p:nvCxnSpPr>
-          <p:cNvPr id="29" name="Grid row line 2"/>
-          <p:cNvCxnSpPr/>
-          <p:nvPr/>
-        </p:nvCxnSpPr>
-        <p:spPr>
-          <a:xfrm>
-            <a:off x="571500" y="8286750"/>
-            <a:ext cx="9544050" cy="0"/>
-          </a:xfrm>
-          <a:prstGeom prst="line">
-            <a:avLst/>
-          </a:prstGeom>
-          <a:ln w="15875">
-            <a:solidFill>
-              <a:srgbClr val="D9A64A"/>
-            </a:solidFill>
-          </a:ln>
-        </p:spPr>
-        <p:style>
-          <a:lnRef idx="2">
-            <a:schemeClr val="accent1"/>
-          </a:lnRef>
-          <a:fillRef idx="0">
-            <a:schemeClr val="accent1"/>
-          </a:fillRef>
-          <a:effectRef idx="1">
-            <a:schemeClr val="accent1"/>
-          </a:effectRef>
-          <a:fontRef idx="minor">
-            <a:schemeClr val="tx1"/>
-          </a:fontRef>
-        </p:style>
-      </p:cxnSp>
-      <p:pic>
-        <p:nvPicPr>
-          <p:cNvPr id="30" name="Icon frame 1." descr="frame.png"/>
+          <p:cNvPr id="10" name="Star top right" descr="star_TR.png"/>
           <p:cNvPicPr>
             <a:picLocks noChangeAspect="1"/>
           </p:cNvPicPr>
@@ -3984,8 +3296,8 @@
         </p:blipFill>
         <p:spPr>
           <a:xfrm>
-            <a:off x="723900" y="5734050"/>
-            <a:ext cx="1143000" cy="1143000"/>
+            <a:off x="10248900" y="95250"/>
+            <a:ext cx="428625" cy="533400"/>
           </a:xfrm>
           <a:prstGeom prst="rect">
             <a:avLst/>
@@ -3994,7 +3306,7 @@
       </p:pic>
       <p:pic>
         <p:nvPicPr>
-          <p:cNvPr id="31" name="Icon Shailaputri" descr="ic_mountains.png"/>
+          <p:cNvPr id="11" name="Chain l1" descr="chain_L1.png"/>
           <p:cNvPicPr>
             <a:picLocks noChangeAspect="1"/>
           </p:cNvPicPr>
@@ -4008,126 +3320,8 @@
         </p:blipFill>
         <p:spPr>
           <a:xfrm>
-            <a:off x="981075" y="5991225"/>
-            <a:ext cx="628650" cy="628650"/>
-          </a:xfrm>
-          <a:prstGeom prst="rect">
-            <a:avLst/>
-          </a:prstGeom>
-        </p:spPr>
-      </p:pic>
-      <p:sp>
-        <p:nvSpPr>
-          <p:cNvPr id="32" name="Form name 1."/>
-          <p:cNvSpPr txBox="1"/>
-          <p:nvPr/>
-        </p:nvSpPr>
-        <p:spPr>
-          <a:xfrm>
-            <a:off x="1905000" y="5886450"/>
-            <a:ext cx="1943100" cy="304800"/>
-          </a:xfrm>
-          <a:prstGeom prst="rect">
-            <a:avLst/>
-          </a:prstGeom>
-          <a:noFill/>
-        </p:spPr>
-        <p:txBody>
-          <a:bodyPr wrap="square" lIns="0" rIns="0" tIns="0" bIns="0" anchor="t">
-            <a:spAutoFit/>
-          </a:bodyPr>
-          <a:lstStyle/>
-          <a:p>
-            <a:pPr algn="ctr">
-              <a:lnSpc>
-                <a:spcPct val="115000"/>
-              </a:lnSpc>
-            </a:pPr>
-            <a:r>
-              <a:rPr sz="1650" b="1">
-                <a:solidFill>
-                  <a:srgbClr val="F2DFA7"/>
-                </a:solidFill>
-                <a:latin typeface="Playfair Display"/>
-              </a:rPr>
-              <a:t>1. Shailaputri</a:t>
-            </a:r>
-          </a:p>
-        </p:txBody>
-      </p:sp>
-      <p:sp>
-        <p:nvSpPr>
-          <p:cNvPr id="33" name="Form meaning 1."/>
-          <p:cNvSpPr txBox="1"/>
-          <p:nvPr/>
-        </p:nvSpPr>
-        <p:spPr>
-          <a:xfrm>
-            <a:off x="1905000" y="6229350"/>
-            <a:ext cx="1943100" cy="571500"/>
-          </a:xfrm>
-          <a:prstGeom prst="rect">
-            <a:avLst/>
-          </a:prstGeom>
-          <a:noFill/>
-        </p:spPr>
-        <p:txBody>
-          <a:bodyPr wrap="square" lIns="0" rIns="0" tIns="0" bIns="0" anchor="t">
-            <a:spAutoFit/>
-          </a:bodyPr>
-          <a:lstStyle/>
-          <a:p>
-            <a:pPr algn="ctr">
-              <a:lnSpc>
-                <a:spcPct val="115000"/>
-              </a:lnSpc>
-            </a:pPr>
-            <a:r>
-              <a:rPr sz="1575" b="1">
-                <a:solidFill>
-                  <a:srgbClr val="F2DFA7"/>
-                </a:solidFill>
-                <a:latin typeface="Open Sans"/>
-              </a:rPr>
-              <a:t>Stability</a:t>
-            </a:r>
-          </a:p>
-          <a:p>
-            <a:pPr algn="ctr">
-              <a:lnSpc>
-                <a:spcPct val="115000"/>
-              </a:lnSpc>
-            </a:pPr>
-            <a:r>
-              <a:rPr sz="1575" b="1">
-                <a:solidFill>
-                  <a:srgbClr val="F2DFA7"/>
-                </a:solidFill>
-                <a:latin typeface="Open Sans"/>
-              </a:rPr>
-              <a:t>and strength</a:t>
-            </a:r>
-          </a:p>
-        </p:txBody>
-      </p:sp>
-      <p:pic>
-        <p:nvPicPr>
-          <p:cNvPr id="34" name="Icon frame 2." descr="frame.png"/>
-          <p:cNvPicPr>
-            <a:picLocks noChangeAspect="1"/>
-          </p:cNvPicPr>
-          <p:nvPr/>
-        </p:nvPicPr>
-        <p:blipFill>
-          <a:blip r:embed="rId10"/>
-          <a:stretch>
-            <a:fillRect/>
-          </a:stretch>
-        </p:blipFill>
-        <p:spPr>
-          <a:xfrm>
-            <a:off x="3924300" y="5734050"/>
-            <a:ext cx="1143000" cy="1143000"/>
+            <a:off x="457200" y="0"/>
+            <a:ext cx="609600" cy="3762375"/>
           </a:xfrm>
           <a:prstGeom prst="rect">
             <a:avLst/>
@@ -4136,7 +3330,7 @@
       </p:pic>
       <p:pic>
         <p:nvPicPr>
-          <p:cNvPr id="35" name="Icon Brahmacharini" descr="ic_mala.png"/>
+          <p:cNvPr id="12" name="Chain l2" descr="chain_L2.png"/>
           <p:cNvPicPr>
             <a:picLocks noChangeAspect="1"/>
           </p:cNvPicPr>
@@ -4150,126 +3344,8 @@
         </p:blipFill>
         <p:spPr>
           <a:xfrm>
-            <a:off x="4181475" y="5991225"/>
-            <a:ext cx="628650" cy="628650"/>
-          </a:xfrm>
-          <a:prstGeom prst="rect">
-            <a:avLst/>
-          </a:prstGeom>
-        </p:spPr>
-      </p:pic>
-      <p:sp>
-        <p:nvSpPr>
-          <p:cNvPr id="36" name="Form name 2."/>
-          <p:cNvSpPr txBox="1"/>
-          <p:nvPr/>
-        </p:nvSpPr>
-        <p:spPr>
-          <a:xfrm>
-            <a:off x="5105400" y="5886450"/>
-            <a:ext cx="1866900" cy="304800"/>
-          </a:xfrm>
-          <a:prstGeom prst="rect">
-            <a:avLst/>
-          </a:prstGeom>
-          <a:noFill/>
-        </p:spPr>
-        <p:txBody>
-          <a:bodyPr wrap="square" lIns="0" rIns="0" tIns="0" bIns="0" anchor="t">
-            <a:spAutoFit/>
-          </a:bodyPr>
-          <a:lstStyle/>
-          <a:p>
-            <a:pPr algn="ctr">
-              <a:lnSpc>
-                <a:spcPct val="115000"/>
-              </a:lnSpc>
-            </a:pPr>
-            <a:r>
-              <a:rPr sz="1650" b="1">
-                <a:solidFill>
-                  <a:srgbClr val="F2DFA7"/>
-                </a:solidFill>
-                <a:latin typeface="Playfair Display"/>
-              </a:rPr>
-              <a:t>2. Brahmacharini</a:t>
-            </a:r>
-          </a:p>
-        </p:txBody>
-      </p:sp>
-      <p:sp>
-        <p:nvSpPr>
-          <p:cNvPr id="37" name="Form meaning 2."/>
-          <p:cNvSpPr txBox="1"/>
-          <p:nvPr/>
-        </p:nvSpPr>
-        <p:spPr>
-          <a:xfrm>
-            <a:off x="5105400" y="6229350"/>
-            <a:ext cx="1866900" cy="571500"/>
-          </a:xfrm>
-          <a:prstGeom prst="rect">
-            <a:avLst/>
-          </a:prstGeom>
-          <a:noFill/>
-        </p:spPr>
-        <p:txBody>
-          <a:bodyPr wrap="square" lIns="0" rIns="0" tIns="0" bIns="0" anchor="t">
-            <a:spAutoFit/>
-          </a:bodyPr>
-          <a:lstStyle/>
-          <a:p>
-            <a:pPr algn="ctr">
-              <a:lnSpc>
-                <a:spcPct val="115000"/>
-              </a:lnSpc>
-            </a:pPr>
-            <a:r>
-              <a:rPr sz="1575" b="1">
-                <a:solidFill>
-                  <a:srgbClr val="F2DFA7"/>
-                </a:solidFill>
-                <a:latin typeface="Open Sans"/>
-              </a:rPr>
-              <a:t>Devotion</a:t>
-            </a:r>
-          </a:p>
-          <a:p>
-            <a:pPr algn="ctr">
-              <a:lnSpc>
-                <a:spcPct val="115000"/>
-              </a:lnSpc>
-            </a:pPr>
-            <a:r>
-              <a:rPr sz="1575" b="1">
-                <a:solidFill>
-                  <a:srgbClr val="F2DFA7"/>
-                </a:solidFill>
-                <a:latin typeface="Open Sans"/>
-              </a:rPr>
-              <a:t>and discipline</a:t>
-            </a:r>
-          </a:p>
-        </p:txBody>
-      </p:sp>
-      <p:pic>
-        <p:nvPicPr>
-          <p:cNvPr id="38" name="Icon frame 3." descr="frame.png"/>
-          <p:cNvPicPr>
-            <a:picLocks noChangeAspect="1"/>
-          </p:cNvPicPr>
-          <p:nvPr/>
-        </p:nvPicPr>
-        <p:blipFill>
-          <a:blip r:embed="rId10"/>
-          <a:stretch>
-            <a:fillRect/>
-          </a:stretch>
-        </p:blipFill>
-        <p:spPr>
-          <a:xfrm>
-            <a:off x="7067550" y="5734050"/>
-            <a:ext cx="1143000" cy="1143000"/>
+            <a:off x="1123950" y="0"/>
+            <a:ext cx="704850" cy="3219450"/>
           </a:xfrm>
           <a:prstGeom prst="rect">
             <a:avLst/>
@@ -4278,7 +3354,7 @@
       </p:pic>
       <p:pic>
         <p:nvPicPr>
-          <p:cNvPr id="39" name="Icon Chandraghanta" descr="ic_crescent.png"/>
+          <p:cNvPr id="13" name="Chain r1" descr="chain_R1.png"/>
           <p:cNvPicPr>
             <a:picLocks noChangeAspect="1"/>
           </p:cNvPicPr>
@@ -4292,126 +3368,8 @@
         </p:blipFill>
         <p:spPr>
           <a:xfrm>
-            <a:off x="7324725" y="5991225"/>
-            <a:ext cx="628650" cy="628650"/>
-          </a:xfrm>
-          <a:prstGeom prst="rect">
-            <a:avLst/>
-          </a:prstGeom>
-        </p:spPr>
-      </p:pic>
-      <p:sp>
-        <p:nvSpPr>
-          <p:cNvPr id="40" name="Form name 3."/>
-          <p:cNvSpPr txBox="1"/>
-          <p:nvPr/>
-        </p:nvSpPr>
-        <p:spPr>
-          <a:xfrm>
-            <a:off x="8248650" y="5886450"/>
-            <a:ext cx="1981200" cy="304800"/>
-          </a:xfrm>
-          <a:prstGeom prst="rect">
-            <a:avLst/>
-          </a:prstGeom>
-          <a:noFill/>
-        </p:spPr>
-        <p:txBody>
-          <a:bodyPr wrap="square" lIns="0" rIns="0" tIns="0" bIns="0" anchor="t">
-            <a:spAutoFit/>
-          </a:bodyPr>
-          <a:lstStyle/>
-          <a:p>
-            <a:pPr algn="ctr">
-              <a:lnSpc>
-                <a:spcPct val="115000"/>
-              </a:lnSpc>
-            </a:pPr>
-            <a:r>
-              <a:rPr sz="1650" b="1">
-                <a:solidFill>
-                  <a:srgbClr val="F2DFA7"/>
-                </a:solidFill>
-                <a:latin typeface="Playfair Display"/>
-              </a:rPr>
-              <a:t>3. Chandraghanta</a:t>
-            </a:r>
-          </a:p>
-        </p:txBody>
-      </p:sp>
-      <p:sp>
-        <p:nvSpPr>
-          <p:cNvPr id="41" name="Form meaning 3."/>
-          <p:cNvSpPr txBox="1"/>
-          <p:nvPr/>
-        </p:nvSpPr>
-        <p:spPr>
-          <a:xfrm>
-            <a:off x="8248650" y="6229350"/>
-            <a:ext cx="1981200" cy="571500"/>
-          </a:xfrm>
-          <a:prstGeom prst="rect">
-            <a:avLst/>
-          </a:prstGeom>
-          <a:noFill/>
-        </p:spPr>
-        <p:txBody>
-          <a:bodyPr wrap="square" lIns="0" rIns="0" tIns="0" bIns="0" anchor="t">
-            <a:spAutoFit/>
-          </a:bodyPr>
-          <a:lstStyle/>
-          <a:p>
-            <a:pPr algn="ctr">
-              <a:lnSpc>
-                <a:spcPct val="115000"/>
-              </a:lnSpc>
-            </a:pPr>
-            <a:r>
-              <a:rPr sz="1575" b="1">
-                <a:solidFill>
-                  <a:srgbClr val="F2DFA7"/>
-                </a:solidFill>
-                <a:latin typeface="Open Sans"/>
-              </a:rPr>
-              <a:t>Courage</a:t>
-            </a:r>
-          </a:p>
-          <a:p>
-            <a:pPr algn="ctr">
-              <a:lnSpc>
-                <a:spcPct val="115000"/>
-              </a:lnSpc>
-            </a:pPr>
-            <a:r>
-              <a:rPr sz="1575" b="1">
-                <a:solidFill>
-                  <a:srgbClr val="F2DFA7"/>
-                </a:solidFill>
-                <a:latin typeface="Open Sans"/>
-              </a:rPr>
-              <a:t>and fearlessness</a:t>
-            </a:r>
-          </a:p>
-        </p:txBody>
-      </p:sp>
-      <p:pic>
-        <p:nvPicPr>
-          <p:cNvPr id="42" name="Icon frame 4." descr="frame.png"/>
-          <p:cNvPicPr>
-            <a:picLocks noChangeAspect="1"/>
-          </p:cNvPicPr>
-          <p:nvPr/>
-        </p:nvPicPr>
-        <p:blipFill>
-          <a:blip r:embed="rId10"/>
-          <a:stretch>
-            <a:fillRect/>
-          </a:stretch>
-        </p:blipFill>
-        <p:spPr>
-          <a:xfrm>
-            <a:off x="723900" y="7067550"/>
-            <a:ext cx="1143000" cy="1143000"/>
+            <a:off x="9601200" y="0"/>
+            <a:ext cx="647700" cy="3762375"/>
           </a:xfrm>
           <a:prstGeom prst="rect">
             <a:avLst/>
@@ -4420,7 +3378,7 @@
       </p:pic>
       <p:pic>
         <p:nvPicPr>
-          <p:cNvPr id="43" name="Icon Kushmanda" descr="ic_sun.png"/>
+          <p:cNvPr id="14" name="Chain r2" descr="chain_R2.png"/>
           <p:cNvPicPr>
             <a:picLocks noChangeAspect="1"/>
           </p:cNvPicPr>
@@ -4434,126 +3392,8 @@
         </p:blipFill>
         <p:spPr>
           <a:xfrm>
-            <a:off x="981075" y="7324725"/>
-            <a:ext cx="628650" cy="628650"/>
-          </a:xfrm>
-          <a:prstGeom prst="rect">
-            <a:avLst/>
-          </a:prstGeom>
-        </p:spPr>
-      </p:pic>
-      <p:sp>
-        <p:nvSpPr>
-          <p:cNvPr id="44" name="Form name 4."/>
-          <p:cNvSpPr txBox="1"/>
-          <p:nvPr/>
-        </p:nvSpPr>
-        <p:spPr>
-          <a:xfrm>
-            <a:off x="1905000" y="7219950"/>
-            <a:ext cx="1943100" cy="304800"/>
-          </a:xfrm>
-          <a:prstGeom prst="rect">
-            <a:avLst/>
-          </a:prstGeom>
-          <a:noFill/>
-        </p:spPr>
-        <p:txBody>
-          <a:bodyPr wrap="square" lIns="0" rIns="0" tIns="0" bIns="0" anchor="t">
-            <a:spAutoFit/>
-          </a:bodyPr>
-          <a:lstStyle/>
-          <a:p>
-            <a:pPr algn="ctr">
-              <a:lnSpc>
-                <a:spcPct val="115000"/>
-              </a:lnSpc>
-            </a:pPr>
-            <a:r>
-              <a:rPr sz="1650" b="1">
-                <a:solidFill>
-                  <a:srgbClr val="F2DFA7"/>
-                </a:solidFill>
-                <a:latin typeface="Playfair Display"/>
-              </a:rPr>
-              <a:t>4. Kushmanda</a:t>
-            </a:r>
-          </a:p>
-        </p:txBody>
-      </p:sp>
-      <p:sp>
-        <p:nvSpPr>
-          <p:cNvPr id="45" name="Form meaning 4."/>
-          <p:cNvSpPr txBox="1"/>
-          <p:nvPr/>
-        </p:nvSpPr>
-        <p:spPr>
-          <a:xfrm>
-            <a:off x="1905000" y="7562850"/>
-            <a:ext cx="1943100" cy="571500"/>
-          </a:xfrm>
-          <a:prstGeom prst="rect">
-            <a:avLst/>
-          </a:prstGeom>
-          <a:noFill/>
-        </p:spPr>
-        <p:txBody>
-          <a:bodyPr wrap="square" lIns="0" rIns="0" tIns="0" bIns="0" anchor="t">
-            <a:spAutoFit/>
-          </a:bodyPr>
-          <a:lstStyle/>
-          <a:p>
-            <a:pPr algn="ctr">
-              <a:lnSpc>
-                <a:spcPct val="115000"/>
-              </a:lnSpc>
-            </a:pPr>
-            <a:r>
-              <a:rPr sz="1575" b="1">
-                <a:solidFill>
-                  <a:srgbClr val="F2DFA7"/>
-                </a:solidFill>
-                <a:latin typeface="Open Sans"/>
-              </a:rPr>
-              <a:t>Creativity</a:t>
-            </a:r>
-          </a:p>
-          <a:p>
-            <a:pPr algn="ctr">
-              <a:lnSpc>
-                <a:spcPct val="115000"/>
-              </a:lnSpc>
-            </a:pPr>
-            <a:r>
-              <a:rPr sz="1575" b="1">
-                <a:solidFill>
-                  <a:srgbClr val="F2DFA7"/>
-                </a:solidFill>
-                <a:latin typeface="Open Sans"/>
-              </a:rPr>
-              <a:t>and energy</a:t>
-            </a:r>
-          </a:p>
-        </p:txBody>
-      </p:sp>
-      <p:pic>
-        <p:nvPicPr>
-          <p:cNvPr id="46" name="Icon frame 5." descr="frame.png"/>
-          <p:cNvPicPr>
-            <a:picLocks noChangeAspect="1"/>
-          </p:cNvPicPr>
-          <p:nvPr/>
-        </p:nvPicPr>
-        <p:blipFill>
-          <a:blip r:embed="rId10"/>
-          <a:stretch>
-            <a:fillRect/>
-          </a:stretch>
-        </p:blipFill>
-        <p:spPr>
-          <a:xfrm>
-            <a:off x="3924300" y="7067550"/>
-            <a:ext cx="1143000" cy="1143000"/>
+            <a:off x="8839200" y="0"/>
+            <a:ext cx="685800" cy="3219450"/>
           </a:xfrm>
           <a:prstGeom prst="rect">
             <a:avLst/>
@@ -4562,7 +3402,7 @@
       </p:pic>
       <p:pic>
         <p:nvPicPr>
-          <p:cNvPr id="47" name="Icon Skandamata" descr="ic_lotus.png"/>
+          <p:cNvPr id="15" name="Durga eyes emblem" descr="eyes.png"/>
           <p:cNvPicPr>
             <a:picLocks noChangeAspect="1"/>
           </p:cNvPicPr>
@@ -4576,126 +3416,8 @@
         </p:blipFill>
         <p:spPr>
           <a:xfrm>
-            <a:off x="4181475" y="7324725"/>
-            <a:ext cx="628650" cy="628650"/>
-          </a:xfrm>
-          <a:prstGeom prst="rect">
-            <a:avLst/>
-          </a:prstGeom>
-        </p:spPr>
-      </p:pic>
-      <p:sp>
-        <p:nvSpPr>
-          <p:cNvPr id="48" name="Form name 5."/>
-          <p:cNvSpPr txBox="1"/>
-          <p:nvPr/>
-        </p:nvSpPr>
-        <p:spPr>
-          <a:xfrm>
-            <a:off x="5105400" y="7219950"/>
-            <a:ext cx="1866900" cy="304800"/>
-          </a:xfrm>
-          <a:prstGeom prst="rect">
-            <a:avLst/>
-          </a:prstGeom>
-          <a:noFill/>
-        </p:spPr>
-        <p:txBody>
-          <a:bodyPr wrap="square" lIns="0" rIns="0" tIns="0" bIns="0" anchor="t">
-            <a:spAutoFit/>
-          </a:bodyPr>
-          <a:lstStyle/>
-          <a:p>
-            <a:pPr algn="ctr">
-              <a:lnSpc>
-                <a:spcPct val="115000"/>
-              </a:lnSpc>
-            </a:pPr>
-            <a:r>
-              <a:rPr sz="1650" b="1">
-                <a:solidFill>
-                  <a:srgbClr val="F2DFA7"/>
-                </a:solidFill>
-                <a:latin typeface="Playfair Display"/>
-              </a:rPr>
-              <a:t>5. Skandamata</a:t>
-            </a:r>
-          </a:p>
-        </p:txBody>
-      </p:sp>
-      <p:sp>
-        <p:nvSpPr>
-          <p:cNvPr id="49" name="Form meaning 5."/>
-          <p:cNvSpPr txBox="1"/>
-          <p:nvPr/>
-        </p:nvSpPr>
-        <p:spPr>
-          <a:xfrm>
-            <a:off x="5105400" y="7562850"/>
-            <a:ext cx="1866900" cy="571500"/>
-          </a:xfrm>
-          <a:prstGeom prst="rect">
-            <a:avLst/>
-          </a:prstGeom>
-          <a:noFill/>
-        </p:spPr>
-        <p:txBody>
-          <a:bodyPr wrap="square" lIns="0" rIns="0" tIns="0" bIns="0" anchor="t">
-            <a:spAutoFit/>
-          </a:bodyPr>
-          <a:lstStyle/>
-          <a:p>
-            <a:pPr algn="ctr">
-              <a:lnSpc>
-                <a:spcPct val="115000"/>
-              </a:lnSpc>
-            </a:pPr>
-            <a:r>
-              <a:rPr sz="1575" b="1">
-                <a:solidFill>
-                  <a:srgbClr val="F2DFA7"/>
-                </a:solidFill>
-                <a:latin typeface="Open Sans"/>
-              </a:rPr>
-              <a:t>Love</a:t>
-            </a:r>
-          </a:p>
-          <a:p>
-            <a:pPr algn="ctr">
-              <a:lnSpc>
-                <a:spcPct val="115000"/>
-              </a:lnSpc>
-            </a:pPr>
-            <a:r>
-              <a:rPr sz="1575" b="1">
-                <a:solidFill>
-                  <a:srgbClr val="F2DFA7"/>
-                </a:solidFill>
-                <a:latin typeface="Open Sans"/>
-              </a:rPr>
-              <a:t>and protection</a:t>
-            </a:r>
-          </a:p>
-        </p:txBody>
-      </p:sp>
-      <p:pic>
-        <p:nvPicPr>
-          <p:cNvPr id="50" name="Icon frame 6." descr="frame.png"/>
-          <p:cNvPicPr>
-            <a:picLocks noChangeAspect="1"/>
-          </p:cNvPicPr>
-          <p:nvPr/>
-        </p:nvPicPr>
-        <p:blipFill>
-          <a:blip r:embed="rId10"/>
-          <a:stretch>
-            <a:fillRect/>
-          </a:stretch>
-        </p:blipFill>
-        <p:spPr>
-          <a:xfrm>
-            <a:off x="7067550" y="7067550"/>
-            <a:ext cx="1143000" cy="1143000"/>
+            <a:off x="3381375" y="266700"/>
+            <a:ext cx="3876675" cy="1847850"/>
           </a:xfrm>
           <a:prstGeom prst="rect">
             <a:avLst/>
@@ -4704,7 +3426,7 @@
       </p:pic>
       <p:pic>
         <p:nvPicPr>
-          <p:cNvPr id="51" name="Icon Katyayani" descr="ic_sword.png"/>
+          <p:cNvPr id="16" name="Divider with lotus" descr="subtitle_divider.png"/>
           <p:cNvPicPr>
             <a:picLocks noChangeAspect="1"/>
           </p:cNvPicPr>
@@ -4718,126 +3440,8 @@
         </p:blipFill>
         <p:spPr>
           <a:xfrm>
-            <a:off x="7324725" y="7324725"/>
-            <a:ext cx="628650" cy="628650"/>
-          </a:xfrm>
-          <a:prstGeom prst="rect">
-            <a:avLst/>
-          </a:prstGeom>
-        </p:spPr>
-      </p:pic>
-      <p:sp>
-        <p:nvSpPr>
-          <p:cNvPr id="52" name="Form name 6."/>
-          <p:cNvSpPr txBox="1"/>
-          <p:nvPr/>
-        </p:nvSpPr>
-        <p:spPr>
-          <a:xfrm>
-            <a:off x="8248650" y="7219950"/>
-            <a:ext cx="1981200" cy="304800"/>
-          </a:xfrm>
-          <a:prstGeom prst="rect">
-            <a:avLst/>
-          </a:prstGeom>
-          <a:noFill/>
-        </p:spPr>
-        <p:txBody>
-          <a:bodyPr wrap="square" lIns="0" rIns="0" tIns="0" bIns="0" anchor="t">
-            <a:spAutoFit/>
-          </a:bodyPr>
-          <a:lstStyle/>
-          <a:p>
-            <a:pPr algn="ctr">
-              <a:lnSpc>
-                <a:spcPct val="115000"/>
-              </a:lnSpc>
-            </a:pPr>
-            <a:r>
-              <a:rPr sz="1650" b="1">
-                <a:solidFill>
-                  <a:srgbClr val="F2DFA7"/>
-                </a:solidFill>
-                <a:latin typeface="Playfair Display"/>
-              </a:rPr>
-              <a:t>6. Katyayani</a:t>
-            </a:r>
-          </a:p>
-        </p:txBody>
-      </p:sp>
-      <p:sp>
-        <p:nvSpPr>
-          <p:cNvPr id="53" name="Form meaning 6."/>
-          <p:cNvSpPr txBox="1"/>
-          <p:nvPr/>
-        </p:nvSpPr>
-        <p:spPr>
-          <a:xfrm>
-            <a:off x="8248650" y="7562850"/>
-            <a:ext cx="1981200" cy="571500"/>
-          </a:xfrm>
-          <a:prstGeom prst="rect">
-            <a:avLst/>
-          </a:prstGeom>
-          <a:noFill/>
-        </p:spPr>
-        <p:txBody>
-          <a:bodyPr wrap="square" lIns="0" rIns="0" tIns="0" bIns="0" anchor="t">
-            <a:spAutoFit/>
-          </a:bodyPr>
-          <a:lstStyle/>
-          <a:p>
-            <a:pPr algn="ctr">
-              <a:lnSpc>
-                <a:spcPct val="115000"/>
-              </a:lnSpc>
-            </a:pPr>
-            <a:r>
-              <a:rPr sz="1575" b="1">
-                <a:solidFill>
-                  <a:srgbClr val="F2DFA7"/>
-                </a:solidFill>
-                <a:latin typeface="Open Sans"/>
-              </a:rPr>
-              <a:t>Righteousness</a:t>
-            </a:r>
-          </a:p>
-          <a:p>
-            <a:pPr algn="ctr">
-              <a:lnSpc>
-                <a:spcPct val="115000"/>
-              </a:lnSpc>
-            </a:pPr>
-            <a:r>
-              <a:rPr sz="1575" b="1">
-                <a:solidFill>
-                  <a:srgbClr val="F2DFA7"/>
-                </a:solidFill>
-                <a:latin typeface="Open Sans"/>
-              </a:rPr>
-              <a:t>and justice</a:t>
-            </a:r>
-          </a:p>
-        </p:txBody>
-      </p:sp>
-      <p:pic>
-        <p:nvPicPr>
-          <p:cNvPr id="54" name="Icon frame 7." descr="frame.png"/>
-          <p:cNvPicPr>
-            <a:picLocks noChangeAspect="1"/>
-          </p:cNvPicPr>
-          <p:nvPr/>
-        </p:nvPicPr>
-        <p:blipFill>
-          <a:blip r:embed="rId10"/>
-          <a:stretch>
-            <a:fillRect/>
-          </a:stretch>
-        </p:blipFill>
-        <p:spPr>
-          <a:xfrm>
-            <a:off x="723900" y="8401050"/>
-            <a:ext cx="1143000" cy="1143000"/>
+            <a:off x="2390775" y="3514725"/>
+            <a:ext cx="5934075" cy="257175"/>
           </a:xfrm>
           <a:prstGeom prst="rect">
             <a:avLst/>
@@ -4846,7 +3450,7 @@
       </p:pic>
       <p:pic>
         <p:nvPicPr>
-          <p:cNvPr id="55" name="Icon Kalaratri" descr="ic_trident.png"/>
+          <p:cNvPr id="17" name="Lotus ornament left" descr="lotus_L.png"/>
           <p:cNvPicPr>
             <a:picLocks noChangeAspect="1"/>
           </p:cNvPicPr>
@@ -4860,126 +3464,8 @@
         </p:blipFill>
         <p:spPr>
           <a:xfrm>
-            <a:off x="981075" y="8658225"/>
-            <a:ext cx="628650" cy="628650"/>
-          </a:xfrm>
-          <a:prstGeom prst="rect">
-            <a:avLst/>
-          </a:prstGeom>
-        </p:spPr>
-      </p:pic>
-      <p:sp>
-        <p:nvSpPr>
-          <p:cNvPr id="56" name="Form name 7."/>
-          <p:cNvSpPr txBox="1"/>
-          <p:nvPr/>
-        </p:nvSpPr>
-        <p:spPr>
-          <a:xfrm>
-            <a:off x="1905000" y="8553450"/>
-            <a:ext cx="1943100" cy="304800"/>
-          </a:xfrm>
-          <a:prstGeom prst="rect">
-            <a:avLst/>
-          </a:prstGeom>
-          <a:noFill/>
-        </p:spPr>
-        <p:txBody>
-          <a:bodyPr wrap="square" lIns="0" rIns="0" tIns="0" bIns="0" anchor="t">
-            <a:spAutoFit/>
-          </a:bodyPr>
-          <a:lstStyle/>
-          <a:p>
-            <a:pPr algn="ctr">
-              <a:lnSpc>
-                <a:spcPct val="115000"/>
-              </a:lnSpc>
-            </a:pPr>
-            <a:r>
-              <a:rPr sz="1650" b="1">
-                <a:solidFill>
-                  <a:srgbClr val="F2DFA7"/>
-                </a:solidFill>
-                <a:latin typeface="Playfair Display"/>
-              </a:rPr>
-              <a:t>7. Kalaratri</a:t>
-            </a:r>
-          </a:p>
-        </p:txBody>
-      </p:sp>
-      <p:sp>
-        <p:nvSpPr>
-          <p:cNvPr id="57" name="Form meaning 7."/>
-          <p:cNvSpPr txBox="1"/>
-          <p:nvPr/>
-        </p:nvSpPr>
-        <p:spPr>
-          <a:xfrm>
-            <a:off x="1905000" y="8896350"/>
-            <a:ext cx="1943100" cy="571500"/>
-          </a:xfrm>
-          <a:prstGeom prst="rect">
-            <a:avLst/>
-          </a:prstGeom>
-          <a:noFill/>
-        </p:spPr>
-        <p:txBody>
-          <a:bodyPr wrap="square" lIns="0" rIns="0" tIns="0" bIns="0" anchor="t">
-            <a:spAutoFit/>
-          </a:bodyPr>
-          <a:lstStyle/>
-          <a:p>
-            <a:pPr algn="ctr">
-              <a:lnSpc>
-                <a:spcPct val="115000"/>
-              </a:lnSpc>
-            </a:pPr>
-            <a:r>
-              <a:rPr sz="1575" b="1">
-                <a:solidFill>
-                  <a:srgbClr val="F2DFA7"/>
-                </a:solidFill>
-                <a:latin typeface="Open Sans"/>
-              </a:rPr>
-              <a:t>Destruction</a:t>
-            </a:r>
-          </a:p>
-          <a:p>
-            <a:pPr algn="ctr">
-              <a:lnSpc>
-                <a:spcPct val="115000"/>
-              </a:lnSpc>
-            </a:pPr>
-            <a:r>
-              <a:rPr sz="1575" b="1">
-                <a:solidFill>
-                  <a:srgbClr val="F2DFA7"/>
-                </a:solidFill>
-                <a:latin typeface="Open Sans"/>
-              </a:rPr>
-              <a:t>of negativity</a:t>
-            </a:r>
-          </a:p>
-        </p:txBody>
-      </p:sp>
-      <p:pic>
-        <p:nvPicPr>
-          <p:cNvPr id="58" name="Icon frame 8." descr="frame.png"/>
-          <p:cNvPicPr>
-            <a:picLocks noChangeAspect="1"/>
-          </p:cNvPicPr>
-          <p:nvPr/>
-        </p:nvPicPr>
-        <p:blipFill>
-          <a:blip r:embed="rId10"/>
-          <a:stretch>
-            <a:fillRect/>
-          </a:stretch>
-        </p:blipFill>
-        <p:spPr>
-          <a:xfrm>
-            <a:off x="3924300" y="8401050"/>
-            <a:ext cx="1143000" cy="1143000"/>
+            <a:off x="762000" y="4114800"/>
+            <a:ext cx="819150" cy="571500"/>
           </a:xfrm>
           <a:prstGeom prst="rect">
             <a:avLst/>
@@ -4988,149 +3474,7 @@
       </p:pic>
       <p:pic>
         <p:nvPicPr>
-          <p:cNvPr id="59" name="Icon Mahagauri" descr="ic_lotus.png"/>
-          <p:cNvPicPr>
-            <a:picLocks noChangeAspect="1"/>
-          </p:cNvPicPr>
-          <p:nvPr/>
-        </p:nvPicPr>
-        <p:blipFill>
-          <a:blip r:embed="rId15"/>
-          <a:stretch>
-            <a:fillRect/>
-          </a:stretch>
-        </p:blipFill>
-        <p:spPr>
-          <a:xfrm>
-            <a:off x="4181475" y="8658225"/>
-            <a:ext cx="628650" cy="628650"/>
-          </a:xfrm>
-          <a:prstGeom prst="rect">
-            <a:avLst/>
-          </a:prstGeom>
-        </p:spPr>
-      </p:pic>
-      <p:sp>
-        <p:nvSpPr>
-          <p:cNvPr id="60" name="Form name 8."/>
-          <p:cNvSpPr txBox="1"/>
-          <p:nvPr/>
-        </p:nvSpPr>
-        <p:spPr>
-          <a:xfrm>
-            <a:off x="5105400" y="8553450"/>
-            <a:ext cx="1866900" cy="304800"/>
-          </a:xfrm>
-          <a:prstGeom prst="rect">
-            <a:avLst/>
-          </a:prstGeom>
-          <a:noFill/>
-        </p:spPr>
-        <p:txBody>
-          <a:bodyPr wrap="square" lIns="0" rIns="0" tIns="0" bIns="0" anchor="t">
-            <a:spAutoFit/>
-          </a:bodyPr>
-          <a:lstStyle/>
-          <a:p>
-            <a:pPr algn="ctr">
-              <a:lnSpc>
-                <a:spcPct val="115000"/>
-              </a:lnSpc>
-            </a:pPr>
-            <a:r>
-              <a:rPr sz="1650" b="1">
-                <a:solidFill>
-                  <a:srgbClr val="F2DFA7"/>
-                </a:solidFill>
-                <a:latin typeface="Playfair Display"/>
-              </a:rPr>
-              <a:t>8. Mahagauri</a:t>
-            </a:r>
-          </a:p>
-        </p:txBody>
-      </p:sp>
-      <p:sp>
-        <p:nvSpPr>
-          <p:cNvPr id="61" name="Form meaning 8."/>
-          <p:cNvSpPr txBox="1"/>
-          <p:nvPr/>
-        </p:nvSpPr>
-        <p:spPr>
-          <a:xfrm>
-            <a:off x="5105400" y="8896350"/>
-            <a:ext cx="1866900" cy="571500"/>
-          </a:xfrm>
-          <a:prstGeom prst="rect">
-            <a:avLst/>
-          </a:prstGeom>
-          <a:noFill/>
-        </p:spPr>
-        <p:txBody>
-          <a:bodyPr wrap="square" lIns="0" rIns="0" tIns="0" bIns="0" anchor="t">
-            <a:spAutoFit/>
-          </a:bodyPr>
-          <a:lstStyle/>
-          <a:p>
-            <a:pPr algn="ctr">
-              <a:lnSpc>
-                <a:spcPct val="115000"/>
-              </a:lnSpc>
-            </a:pPr>
-            <a:r>
-              <a:rPr sz="1575" b="1">
-                <a:solidFill>
-                  <a:srgbClr val="F2DFA7"/>
-                </a:solidFill>
-                <a:latin typeface="Open Sans"/>
-              </a:rPr>
-              <a:t>Purity</a:t>
-            </a:r>
-          </a:p>
-          <a:p>
-            <a:pPr algn="ctr">
-              <a:lnSpc>
-                <a:spcPct val="115000"/>
-              </a:lnSpc>
-            </a:pPr>
-            <a:r>
-              <a:rPr sz="1575" b="1">
-                <a:solidFill>
-                  <a:srgbClr val="F2DFA7"/>
-                </a:solidFill>
-                <a:latin typeface="Open Sans"/>
-              </a:rPr>
-              <a:t>and peace</a:t>
-            </a:r>
-          </a:p>
-        </p:txBody>
-      </p:sp>
-      <p:pic>
-        <p:nvPicPr>
-          <p:cNvPr id="62" name="Icon frame 9." descr="frame.png"/>
-          <p:cNvPicPr>
-            <a:picLocks noChangeAspect="1"/>
-          </p:cNvPicPr>
-          <p:nvPr/>
-        </p:nvPicPr>
-        <p:blipFill>
-          <a:blip r:embed="rId10"/>
-          <a:stretch>
-            <a:fillRect/>
-          </a:stretch>
-        </p:blipFill>
-        <p:spPr>
-          <a:xfrm>
-            <a:off x="7067550" y="8401050"/>
-            <a:ext cx="1143000" cy="1143000"/>
-          </a:xfrm>
-          <a:prstGeom prst="rect">
-            <a:avLst/>
-          </a:prstGeom>
-        </p:spPr>
-      </p:pic>
-      <p:pic>
-        <p:nvPicPr>
-          <p:cNvPr id="63" name="Icon Siddhidatri" descr="ic_om.png"/>
+          <p:cNvPr id="18" name="Lotus ornament right" descr="lotus_R.png"/>
           <p:cNvPicPr>
             <a:picLocks noChangeAspect="1"/>
           </p:cNvPicPr>
@@ -5144,174 +3488,17 @@
         </p:blipFill>
         <p:spPr>
           <a:xfrm>
-            <a:off x="7324725" y="8658225"/>
-            <a:ext cx="628650" cy="628650"/>
+            <a:off x="9124950" y="4114800"/>
+            <a:ext cx="819150" cy="571500"/>
           </a:xfrm>
           <a:prstGeom prst="rect">
             <a:avLst/>
           </a:prstGeom>
         </p:spPr>
       </p:pic>
-      <p:sp>
-        <p:nvSpPr>
-          <p:cNvPr id="64" name="Form name 9."/>
-          <p:cNvSpPr txBox="1"/>
-          <p:nvPr/>
-        </p:nvSpPr>
-        <p:spPr>
-          <a:xfrm>
-            <a:off x="8248650" y="8553450"/>
-            <a:ext cx="1981200" cy="304800"/>
-          </a:xfrm>
-          <a:prstGeom prst="rect">
-            <a:avLst/>
-          </a:prstGeom>
-          <a:noFill/>
-        </p:spPr>
-        <p:txBody>
-          <a:bodyPr wrap="square" lIns="0" rIns="0" tIns="0" bIns="0" anchor="t">
-            <a:spAutoFit/>
-          </a:bodyPr>
-          <a:lstStyle/>
-          <a:p>
-            <a:pPr algn="ctr">
-              <a:lnSpc>
-                <a:spcPct val="115000"/>
-              </a:lnSpc>
-            </a:pPr>
-            <a:r>
-              <a:rPr sz="1650" b="1">
-                <a:solidFill>
-                  <a:srgbClr val="F2DFA7"/>
-                </a:solidFill>
-                <a:latin typeface="Playfair Display"/>
-              </a:rPr>
-              <a:t>9. Siddhidatri</a:t>
-            </a:r>
-          </a:p>
-        </p:txBody>
-      </p:sp>
-      <p:sp>
-        <p:nvSpPr>
-          <p:cNvPr id="65" name="Form meaning 9."/>
-          <p:cNvSpPr txBox="1"/>
-          <p:nvPr/>
-        </p:nvSpPr>
-        <p:spPr>
-          <a:xfrm>
-            <a:off x="8248650" y="8896350"/>
-            <a:ext cx="1981200" cy="571500"/>
-          </a:xfrm>
-          <a:prstGeom prst="rect">
-            <a:avLst/>
-          </a:prstGeom>
-          <a:noFill/>
-        </p:spPr>
-        <p:txBody>
-          <a:bodyPr wrap="square" lIns="0" rIns="0" tIns="0" bIns="0" anchor="t">
-            <a:spAutoFit/>
-          </a:bodyPr>
-          <a:lstStyle/>
-          <a:p>
-            <a:pPr algn="ctr">
-              <a:lnSpc>
-                <a:spcPct val="115000"/>
-              </a:lnSpc>
-            </a:pPr>
-            <a:r>
-              <a:rPr sz="1575" b="1">
-                <a:solidFill>
-                  <a:srgbClr val="F2DFA7"/>
-                </a:solidFill>
-                <a:latin typeface="Open Sans"/>
-              </a:rPr>
-              <a:t>Wisdom</a:t>
-            </a:r>
-          </a:p>
-          <a:p>
-            <a:pPr algn="ctr">
-              <a:lnSpc>
-                <a:spcPct val="115000"/>
-              </a:lnSpc>
-            </a:pPr>
-            <a:r>
-              <a:rPr sz="1575" b="1">
-                <a:solidFill>
-                  <a:srgbClr val="F2DFA7"/>
-                </a:solidFill>
-                <a:latin typeface="Open Sans"/>
-              </a:rPr>
-              <a:t>and fulfillment</a:t>
-            </a:r>
-          </a:p>
-        </p:txBody>
-      </p:sp>
       <p:pic>
         <p:nvPicPr>
-          <p:cNvPr id="66" name="Divider lotus 2" descr="orn_lotus.png"/>
-          <p:cNvPicPr>
-            <a:picLocks noChangeAspect="1"/>
-          </p:cNvPicPr>
-          <p:nvPr/>
-        </p:nvPicPr>
-        <p:blipFill>
-          <a:blip r:embed="rId9"/>
-          <a:stretch>
-            <a:fillRect/>
-          </a:stretch>
-        </p:blipFill>
-        <p:spPr>
-          <a:xfrm>
-            <a:off x="5133975" y="9563100"/>
-            <a:ext cx="419100" cy="285750"/>
-          </a:xfrm>
-          <a:prstGeom prst="rect">
-            <a:avLst/>
-          </a:prstGeom>
-        </p:spPr>
-      </p:pic>
-      <p:sp>
-        <p:nvSpPr>
-          <p:cNvPr id="67" name="Heading: How It Is Celebrated"/>
-          <p:cNvSpPr txBox="1"/>
-          <p:nvPr/>
-        </p:nvSpPr>
-        <p:spPr>
-          <a:xfrm>
-            <a:off x="619125" y="9925050"/>
-            <a:ext cx="3143250" cy="400050"/>
-          </a:xfrm>
-          <a:prstGeom prst="rect">
-            <a:avLst/>
-          </a:prstGeom>
-          <a:noFill/>
-        </p:spPr>
-        <p:txBody>
-          <a:bodyPr wrap="square" lIns="0" rIns="0" tIns="0" bIns="0" anchor="t">
-            <a:spAutoFit/>
-          </a:bodyPr>
-          <a:lstStyle/>
-          <a:p>
-            <a:pPr algn="ctr">
-              <a:lnSpc>
-                <a:spcPct val="115000"/>
-              </a:lnSpc>
-            </a:pPr>
-            <a:r>
-              <a:rPr sz="2325" b="1">
-                <a:solidFill>
-                  <a:srgbClr val="F2DFA7"/>
-                </a:solidFill>
-                <a:latin typeface="Playfair Display"/>
-              </a:rPr>
-              <a:t>How It Is Celebrated</a:t>
-            </a:r>
-          </a:p>
-        </p:txBody>
-      </p:sp>
-      <p:pic>
-        <p:nvPicPr>
-          <p:cNvPr id="68" name="Bottom icon How It Is Celebrated" descr="ic_dandiya.png"/>
+          <p:cNvPr id="19" name="Nine forms frame" descr="grid_frame.png"/>
           <p:cNvPicPr>
             <a:picLocks noChangeAspect="1"/>
           </p:cNvPicPr>
@@ -5325,293 +3512,17 @@
         </p:blipFill>
         <p:spPr>
           <a:xfrm>
-            <a:off x="1619250" y="10334625"/>
-            <a:ext cx="1143000" cy="831273"/>
+            <a:off x="257175" y="5334000"/>
+            <a:ext cx="10182225" cy="4581525"/>
           </a:xfrm>
           <a:prstGeom prst="rect">
             <a:avLst/>
           </a:prstGeom>
         </p:spPr>
       </p:pic>
-      <p:sp>
-        <p:nvSpPr>
-          <p:cNvPr id="69" name="Body: How It Is Celebrated"/>
-          <p:cNvSpPr txBox="1"/>
-          <p:nvPr/>
-        </p:nvSpPr>
-        <p:spPr>
-          <a:xfrm>
-            <a:off x="714375" y="11296650"/>
-            <a:ext cx="2952750" cy="1428750"/>
-          </a:xfrm>
-          <a:prstGeom prst="rect">
-            <a:avLst/>
-          </a:prstGeom>
-          <a:noFill/>
-        </p:spPr>
-        <p:txBody>
-          <a:bodyPr wrap="square" lIns="0" rIns="0" tIns="0" bIns="0" anchor="t">
-            <a:spAutoFit/>
-          </a:bodyPr>
-          <a:lstStyle/>
-          <a:p>
-            <a:pPr algn="ctr">
-              <a:lnSpc>
-                <a:spcPct val="120000"/>
-              </a:lnSpc>
-            </a:pPr>
-            <a:r>
-              <a:rPr sz="1725" b="1">
-                <a:solidFill>
-                  <a:srgbClr val="F2DFA7"/>
-                </a:solidFill>
-                <a:latin typeface="Open Sans"/>
-              </a:rPr>
-              <a:t>Prayer, fasting,</a:t>
-            </a:r>
-          </a:p>
-          <a:p>
-            <a:pPr algn="ctr">
-              <a:lnSpc>
-                <a:spcPct val="120000"/>
-              </a:lnSpc>
-            </a:pPr>
-            <a:r>
-              <a:rPr sz="1725" b="1">
-                <a:solidFill>
-                  <a:srgbClr val="F2DFA7"/>
-                </a:solidFill>
-                <a:latin typeface="Open Sans"/>
-              </a:rPr>
-              <a:t>Garba and Dandiya, and</a:t>
-            </a:r>
-          </a:p>
-          <a:p>
-            <a:pPr algn="ctr">
-              <a:lnSpc>
-                <a:spcPct val="120000"/>
-              </a:lnSpc>
-            </a:pPr>
-            <a:r>
-              <a:rPr sz="1725" b="1">
-                <a:solidFill>
-                  <a:srgbClr val="F2DFA7"/>
-                </a:solidFill>
-                <a:latin typeface="Open Sans"/>
-              </a:rPr>
-              <a:t>community gatherings</a:t>
-            </a:r>
-          </a:p>
-          <a:p>
-            <a:pPr algn="ctr">
-              <a:lnSpc>
-                <a:spcPct val="120000"/>
-              </a:lnSpc>
-            </a:pPr>
-            <a:r>
-              <a:rPr sz="1725" b="1">
-                <a:solidFill>
-                  <a:srgbClr val="F2DFA7"/>
-                </a:solidFill>
-                <a:latin typeface="Open Sans"/>
-              </a:rPr>
-              <a:t>with joy and devotion.</a:t>
-            </a:r>
-          </a:p>
-        </p:txBody>
-      </p:sp>
-      <p:sp>
-        <p:nvSpPr>
-          <p:cNvPr id="70" name="Heading: Who Is Worshipped"/>
-          <p:cNvSpPr txBox="1"/>
-          <p:nvPr/>
-        </p:nvSpPr>
-        <p:spPr>
-          <a:xfrm>
-            <a:off x="3810000" y="9925050"/>
-            <a:ext cx="3143250" cy="400050"/>
-          </a:xfrm>
-          <a:prstGeom prst="rect">
-            <a:avLst/>
-          </a:prstGeom>
-          <a:noFill/>
-        </p:spPr>
-        <p:txBody>
-          <a:bodyPr wrap="square" lIns="0" rIns="0" tIns="0" bIns="0" anchor="t">
-            <a:spAutoFit/>
-          </a:bodyPr>
-          <a:lstStyle/>
-          <a:p>
-            <a:pPr algn="ctr">
-              <a:lnSpc>
-                <a:spcPct val="115000"/>
-              </a:lnSpc>
-            </a:pPr>
-            <a:r>
-              <a:rPr sz="2325" b="1">
-                <a:solidFill>
-                  <a:srgbClr val="F2DFA7"/>
-                </a:solidFill>
-                <a:latin typeface="Playfair Display"/>
-              </a:rPr>
-              <a:t>Who Is Worshipped</a:t>
-            </a:r>
-          </a:p>
-        </p:txBody>
-      </p:sp>
       <p:pic>
         <p:nvPicPr>
-          <p:cNvPr id="71" name="Bottom icon Who Is Worshipped" descr="ic_lotus.png"/>
-          <p:cNvPicPr>
-            <a:picLocks noChangeAspect="1"/>
-          </p:cNvPicPr>
-          <p:nvPr/>
-        </p:nvPicPr>
-        <p:blipFill>
-          <a:blip r:embed="rId15"/>
-          <a:stretch>
-            <a:fillRect/>
-          </a:stretch>
-        </p:blipFill>
-        <p:spPr>
-          <a:xfrm>
-            <a:off x="4924425" y="10334625"/>
-            <a:ext cx="914400" cy="914400"/>
-          </a:xfrm>
-          <a:prstGeom prst="rect">
-            <a:avLst/>
-          </a:prstGeom>
-        </p:spPr>
-      </p:pic>
-      <p:sp>
-        <p:nvSpPr>
-          <p:cNvPr id="72" name="Body: Who Is Worshipped"/>
-          <p:cNvSpPr txBox="1"/>
-          <p:nvPr/>
-        </p:nvSpPr>
-        <p:spPr>
-          <a:xfrm>
-            <a:off x="3905250" y="11296650"/>
-            <a:ext cx="2952750" cy="1428750"/>
-          </a:xfrm>
-          <a:prstGeom prst="rect">
-            <a:avLst/>
-          </a:prstGeom>
-          <a:noFill/>
-        </p:spPr>
-        <p:txBody>
-          <a:bodyPr wrap="square" lIns="0" rIns="0" tIns="0" bIns="0" anchor="t">
-            <a:spAutoFit/>
-          </a:bodyPr>
-          <a:lstStyle/>
-          <a:p>
-            <a:pPr algn="ctr">
-              <a:lnSpc>
-                <a:spcPct val="120000"/>
-              </a:lnSpc>
-            </a:pPr>
-            <a:r>
-              <a:rPr sz="1725" b="1">
-                <a:solidFill>
-                  <a:srgbClr val="F2DFA7"/>
-                </a:solidFill>
-                <a:latin typeface="Open Sans"/>
-              </a:rPr>
-              <a:t>Goddess Durga,</a:t>
-            </a:r>
-          </a:p>
-          <a:p>
-            <a:pPr algn="ctr">
-              <a:lnSpc>
-                <a:spcPct val="120000"/>
-              </a:lnSpc>
-            </a:pPr>
-            <a:r>
-              <a:rPr sz="1725" b="1">
-                <a:solidFill>
-                  <a:srgbClr val="F2DFA7"/>
-                </a:solidFill>
-                <a:latin typeface="Open Sans"/>
-              </a:rPr>
-              <a:t>the Divine Mother, is</a:t>
-            </a:r>
-          </a:p>
-          <a:p>
-            <a:pPr algn="ctr">
-              <a:lnSpc>
-                <a:spcPct val="120000"/>
-              </a:lnSpc>
-            </a:pPr>
-            <a:r>
-              <a:rPr sz="1725" b="1">
-                <a:solidFill>
-                  <a:srgbClr val="F2DFA7"/>
-                </a:solidFill>
-                <a:latin typeface="Open Sans"/>
-              </a:rPr>
-              <a:t>worshipped in her nine</a:t>
-            </a:r>
-          </a:p>
-          <a:p>
-            <a:pPr algn="ctr">
-              <a:lnSpc>
-                <a:spcPct val="120000"/>
-              </a:lnSpc>
-            </a:pPr>
-            <a:r>
-              <a:rPr sz="1725" b="1">
-                <a:solidFill>
-                  <a:srgbClr val="F2DFA7"/>
-                </a:solidFill>
-                <a:latin typeface="Open Sans"/>
-              </a:rPr>
-              <a:t>forms (Navadurga).</a:t>
-            </a:r>
-          </a:p>
-        </p:txBody>
-      </p:sp>
-      <p:sp>
-        <p:nvSpPr>
-          <p:cNvPr id="73" name="Heading: What It Means"/>
-          <p:cNvSpPr txBox="1"/>
-          <p:nvPr/>
-        </p:nvSpPr>
-        <p:spPr>
-          <a:xfrm>
-            <a:off x="7096125" y="9925050"/>
-            <a:ext cx="3143250" cy="400050"/>
-          </a:xfrm>
-          <a:prstGeom prst="rect">
-            <a:avLst/>
-          </a:prstGeom>
-          <a:noFill/>
-        </p:spPr>
-        <p:txBody>
-          <a:bodyPr wrap="square" lIns="0" rIns="0" tIns="0" bIns="0" anchor="t">
-            <a:spAutoFit/>
-          </a:bodyPr>
-          <a:lstStyle/>
-          <a:p>
-            <a:pPr algn="ctr">
-              <a:lnSpc>
-                <a:spcPct val="115000"/>
-              </a:lnSpc>
-            </a:pPr>
-            <a:r>
-              <a:rPr sz="2325" b="1">
-                <a:solidFill>
-                  <a:srgbClr val="F2DFA7"/>
-                </a:solidFill>
-                <a:latin typeface="Playfair Display"/>
-              </a:rPr>
-              <a:t>What It Means</a:t>
-            </a:r>
-          </a:p>
-        </p:txBody>
-      </p:sp>
-      <p:pic>
-        <p:nvPicPr>
-          <p:cNvPr id="74" name="Bottom icon What It Means" descr="ic_diya.png"/>
+          <p:cNvPr id="20" name="Grid vline 1" descr="grid_vline_1.png"/>
           <p:cNvPicPr>
             <a:picLocks noChangeAspect="1"/>
           </p:cNvPicPr>
@@ -5625,211 +3536,1938 @@
         </p:blipFill>
         <p:spPr>
           <a:xfrm>
-            <a:off x="8210550" y="10334625"/>
-            <a:ext cx="914400" cy="914400"/>
+            <a:off x="3810000" y="6238875"/>
+            <a:ext cx="209550" cy="3086100"/>
           </a:xfrm>
           <a:prstGeom prst="rect">
             <a:avLst/>
           </a:prstGeom>
         </p:spPr>
       </p:pic>
-      <p:sp>
-        <p:nvSpPr>
-          <p:cNvPr id="75" name="Body: What It Means"/>
-          <p:cNvSpPr txBox="1"/>
-          <p:nvPr/>
-        </p:nvSpPr>
-        <p:spPr>
-          <a:xfrm>
-            <a:off x="7191375" y="11296650"/>
-            <a:ext cx="2952750" cy="1428750"/>
-          </a:xfrm>
-          <a:prstGeom prst="rect">
-            <a:avLst/>
-          </a:prstGeom>
-          <a:noFill/>
-        </p:spPr>
-        <p:txBody>
-          <a:bodyPr wrap="square" lIns="0" rIns="0" tIns="0" bIns="0" anchor="t">
-            <a:spAutoFit/>
-          </a:bodyPr>
-          <a:lstStyle/>
-          <a:p>
-            <a:pPr algn="ctr">
-              <a:lnSpc>
-                <a:spcPct val="120000"/>
-              </a:lnSpc>
-            </a:pPr>
-            <a:r>
-              <a:rPr sz="1725" b="1">
-                <a:solidFill>
-                  <a:srgbClr val="F2DFA7"/>
-                </a:solidFill>
-                <a:latin typeface="Open Sans"/>
-              </a:rPr>
-              <a:t>Navratri reminds us to</a:t>
-            </a:r>
-          </a:p>
-          <a:p>
-            <a:pPr algn="ctr">
-              <a:lnSpc>
-                <a:spcPct val="120000"/>
-              </a:lnSpc>
-            </a:pPr>
-            <a:r>
-              <a:rPr sz="1725" b="1">
-                <a:solidFill>
-                  <a:srgbClr val="F2DFA7"/>
-                </a:solidFill>
-                <a:latin typeface="Open Sans"/>
-              </a:rPr>
-              <a:t>overcome negativity,</a:t>
-            </a:r>
-          </a:p>
-          <a:p>
-            <a:pPr algn="ctr">
-              <a:lnSpc>
-                <a:spcPct val="120000"/>
-              </a:lnSpc>
-            </a:pPr>
-            <a:r>
-              <a:rPr sz="1725" b="1">
-                <a:solidFill>
-                  <a:srgbClr val="F2DFA7"/>
-                </a:solidFill>
-                <a:latin typeface="Open Sans"/>
-              </a:rPr>
-              <a:t>cultivate inner strength,</a:t>
-            </a:r>
-          </a:p>
-          <a:p>
-            <a:pPr algn="ctr">
-              <a:lnSpc>
-                <a:spcPct val="120000"/>
-              </a:lnSpc>
-            </a:pPr>
-            <a:r>
-              <a:rPr sz="1725" b="1">
-                <a:solidFill>
-                  <a:srgbClr val="F2DFA7"/>
-                </a:solidFill>
-                <a:latin typeface="Open Sans"/>
-              </a:rPr>
-              <a:t>and embrace new</a:t>
-            </a:r>
-          </a:p>
-          <a:p>
-            <a:pPr algn="ctr">
-              <a:lnSpc>
-                <a:spcPct val="120000"/>
-              </a:lnSpc>
-            </a:pPr>
-            <a:r>
-              <a:rPr sz="1725" b="1">
-                <a:solidFill>
-                  <a:srgbClr val="F2DFA7"/>
-                </a:solidFill>
-                <a:latin typeface="Open Sans"/>
-              </a:rPr>
-              <a:t>beginnings.</a:t>
-            </a:r>
-          </a:p>
-        </p:txBody>
-      </p:sp>
-      <p:cxnSp>
-        <p:nvCxnSpPr>
-          <p:cNvPr id="76" name="Bottom column line 1"/>
-          <p:cNvCxnSpPr/>
-          <p:nvPr/>
-        </p:nvCxnSpPr>
-        <p:spPr>
-          <a:xfrm>
-            <a:off x="3762375" y="9906000"/>
-            <a:ext cx="0" cy="2476500"/>
-          </a:xfrm>
-          <a:prstGeom prst="line">
-            <a:avLst/>
-          </a:prstGeom>
-          <a:ln w="15875">
-            <a:solidFill>
-              <a:srgbClr val="D9A64A"/>
-            </a:solidFill>
-          </a:ln>
-        </p:spPr>
-        <p:style>
-          <a:lnRef idx="2">
-            <a:schemeClr val="accent1"/>
-          </a:lnRef>
-          <a:fillRef idx="0">
-            <a:schemeClr val="accent1"/>
-          </a:fillRef>
-          <a:effectRef idx="1">
-            <a:schemeClr val="accent1"/>
-          </a:effectRef>
-          <a:fontRef idx="minor">
-            <a:schemeClr val="tx1"/>
-          </a:fontRef>
-        </p:style>
-      </p:cxnSp>
-      <p:cxnSp>
-        <p:nvCxnSpPr>
-          <p:cNvPr id="77" name="Bottom column line 2"/>
-          <p:cNvCxnSpPr/>
-          <p:nvPr/>
-        </p:nvCxnSpPr>
-        <p:spPr>
-          <a:xfrm>
-            <a:off x="7000875" y="9906000"/>
-            <a:ext cx="0" cy="2476500"/>
-          </a:xfrm>
-          <a:prstGeom prst="line">
-            <a:avLst/>
-          </a:prstGeom>
-          <a:ln w="15875">
-            <a:solidFill>
-              <a:srgbClr val="D9A64A"/>
-            </a:solidFill>
-          </a:ln>
-        </p:spPr>
-        <p:style>
-          <a:lnRef idx="2">
-            <a:schemeClr val="accent1"/>
-          </a:lnRef>
-          <a:fillRef idx="0">
-            <a:schemeClr val="accent1"/>
-          </a:fillRef>
-          <a:effectRef idx="1">
-            <a:schemeClr val="accent1"/>
-          </a:effectRef>
-          <a:fontRef idx="minor">
-            <a:schemeClr val="tx1"/>
-          </a:fontRef>
-        </p:style>
-      </p:cxnSp>
       <p:pic>
         <p:nvPicPr>
-          <p:cNvPr id="78" name="Divider lotus 3" descr="orn_lotus.png"/>
+          <p:cNvPr id="21" name="Grid vline 2" descr="grid_vline_2.png"/>
           <p:cNvPicPr>
             <a:picLocks noChangeAspect="1"/>
           </p:cNvPicPr>
           <p:nvPr/>
         </p:nvPicPr>
         <p:blipFill>
-          <a:blip r:embed="rId9"/>
+          <a:blip r:embed="rId21"/>
           <a:stretch>
             <a:fillRect/>
           </a:stretch>
         </p:blipFill>
         <p:spPr>
           <a:xfrm>
-            <a:off x="5133975" y="12592050"/>
-            <a:ext cx="419100" cy="285750"/>
+            <a:off x="6915150" y="5753100"/>
+            <a:ext cx="219075" cy="3752850"/>
           </a:xfrm>
           <a:prstGeom prst="rect">
             <a:avLst/>
           </a:prstGeom>
         </p:spPr>
       </p:pic>
+      <p:pic>
+        <p:nvPicPr>
+          <p:cNvPr id="22" name="Grid hline 1" descr="grid_hline_1.png"/>
+          <p:cNvPicPr>
+            <a:picLocks noChangeAspect="1"/>
+          </p:cNvPicPr>
+          <p:nvPr/>
+        </p:nvPicPr>
+        <p:blipFill>
+          <a:blip r:embed="rId22"/>
+          <a:stretch>
+            <a:fillRect/>
+          </a:stretch>
+        </p:blipFill>
+        <p:spPr>
+          <a:xfrm>
+            <a:off x="533400" y="6896100"/>
+            <a:ext cx="9639300" cy="247650"/>
+          </a:xfrm>
+          <a:prstGeom prst="rect">
+            <a:avLst/>
+          </a:prstGeom>
+        </p:spPr>
+      </p:pic>
+      <p:pic>
+        <p:nvPicPr>
+          <p:cNvPr id="23" name="Grid hline 2" descr="grid_hline_2.png"/>
+          <p:cNvPicPr>
+            <a:picLocks noChangeAspect="1"/>
+          </p:cNvPicPr>
+          <p:nvPr/>
+        </p:nvPicPr>
+        <p:blipFill>
+          <a:blip r:embed="rId23"/>
+          <a:stretch>
+            <a:fillRect/>
+          </a:stretch>
+        </p:blipFill>
+        <p:spPr>
+          <a:xfrm>
+            <a:off x="723900" y="8172450"/>
+            <a:ext cx="9305925" cy="247650"/>
+          </a:xfrm>
+          <a:prstGeom prst="rect">
+            <a:avLst/>
+          </a:prstGeom>
+        </p:spPr>
+      </p:pic>
+      <p:pic>
+        <p:nvPicPr>
+          <p:cNvPr id="24" name="Section banner" descr="banner.png"/>
+          <p:cNvPicPr>
+            <a:picLocks noChangeAspect="1"/>
+          </p:cNvPicPr>
+          <p:nvPr/>
+        </p:nvPicPr>
+        <p:blipFill>
+          <a:blip r:embed="rId24"/>
+          <a:stretch>
+            <a:fillRect/>
+          </a:stretch>
+        </p:blipFill>
+        <p:spPr>
+          <a:xfrm>
+            <a:off x="2000250" y="5010150"/>
+            <a:ext cx="6705600" cy="609600"/>
+          </a:xfrm>
+          <a:prstGeom prst="rect">
+            <a:avLst/>
+          </a:prstGeom>
+        </p:spPr>
+      </p:pic>
+      <p:pic>
+        <p:nvPicPr>
+          <p:cNvPr id="25" name="Icon shailaputri" descr="icon_shailaputri.png"/>
+          <p:cNvPicPr>
+            <a:picLocks noChangeAspect="1"/>
+          </p:cNvPicPr>
+          <p:nvPr/>
+        </p:nvPicPr>
+        <p:blipFill>
+          <a:blip r:embed="rId25"/>
+          <a:stretch>
+            <a:fillRect/>
+          </a:stretch>
+        </p:blipFill>
+        <p:spPr>
+          <a:xfrm>
+            <a:off x="781050" y="5676900"/>
+            <a:ext cx="1266825" cy="1228725"/>
+          </a:xfrm>
+          <a:prstGeom prst="rect">
+            <a:avLst/>
+          </a:prstGeom>
+        </p:spPr>
+      </p:pic>
+      <p:pic>
+        <p:nvPicPr>
+          <p:cNvPr id="26" name="Icon brahmacharini" descr="icon_brahmacharini.png"/>
+          <p:cNvPicPr>
+            <a:picLocks noChangeAspect="1"/>
+          </p:cNvPicPr>
+          <p:nvPr/>
+        </p:nvPicPr>
+        <p:blipFill>
+          <a:blip r:embed="rId26"/>
+          <a:stretch>
+            <a:fillRect/>
+          </a:stretch>
+        </p:blipFill>
+        <p:spPr>
+          <a:xfrm>
+            <a:off x="3952875" y="5686425"/>
+            <a:ext cx="1238250" cy="1228725"/>
+          </a:xfrm>
+          <a:prstGeom prst="rect">
+            <a:avLst/>
+          </a:prstGeom>
+        </p:spPr>
+      </p:pic>
+      <p:pic>
+        <p:nvPicPr>
+          <p:cNvPr id="27" name="Icon chandraghanta" descr="icon_chandraghanta.png"/>
+          <p:cNvPicPr>
+            <a:picLocks noChangeAspect="1"/>
+          </p:cNvPicPr>
+          <p:nvPr/>
+        </p:nvPicPr>
+        <p:blipFill>
+          <a:blip r:embed="rId27"/>
+          <a:stretch>
+            <a:fillRect/>
+          </a:stretch>
+        </p:blipFill>
+        <p:spPr>
+          <a:xfrm>
+            <a:off x="7029450" y="5686425"/>
+            <a:ext cx="1304925" cy="1266825"/>
+          </a:xfrm>
+          <a:prstGeom prst="rect">
+            <a:avLst/>
+          </a:prstGeom>
+        </p:spPr>
+      </p:pic>
+      <p:pic>
+        <p:nvPicPr>
+          <p:cNvPr id="28" name="Icon kushmanda" descr="icon_kushmanda.png"/>
+          <p:cNvPicPr>
+            <a:picLocks noChangeAspect="1"/>
+          </p:cNvPicPr>
+          <p:nvPr/>
+        </p:nvPicPr>
+        <p:blipFill>
+          <a:blip r:embed="rId28"/>
+          <a:stretch>
+            <a:fillRect/>
+          </a:stretch>
+        </p:blipFill>
+        <p:spPr>
+          <a:xfrm>
+            <a:off x="781050" y="7067550"/>
+            <a:ext cx="1247775" cy="1152525"/>
+          </a:xfrm>
+          <a:prstGeom prst="rect">
+            <a:avLst/>
+          </a:prstGeom>
+        </p:spPr>
+      </p:pic>
+      <p:pic>
+        <p:nvPicPr>
+          <p:cNvPr id="29" name="Icon skandamata" descr="icon_skandamata.png"/>
+          <p:cNvPicPr>
+            <a:picLocks noChangeAspect="1"/>
+          </p:cNvPicPr>
+          <p:nvPr/>
+        </p:nvPicPr>
+        <p:blipFill>
+          <a:blip r:embed="rId29"/>
+          <a:stretch>
+            <a:fillRect/>
+          </a:stretch>
+        </p:blipFill>
+        <p:spPr>
+          <a:xfrm>
+            <a:off x="3962400" y="7067550"/>
+            <a:ext cx="1209675" cy="1171575"/>
+          </a:xfrm>
+          <a:prstGeom prst="rect">
+            <a:avLst/>
+          </a:prstGeom>
+        </p:spPr>
+      </p:pic>
+      <p:pic>
+        <p:nvPicPr>
+          <p:cNvPr id="30" name="Icon katyayani" descr="icon_katyayani.png"/>
+          <p:cNvPicPr>
+            <a:picLocks noChangeAspect="1"/>
+          </p:cNvPicPr>
+          <p:nvPr/>
+        </p:nvPicPr>
+        <p:blipFill>
+          <a:blip r:embed="rId30"/>
+          <a:stretch>
+            <a:fillRect/>
+          </a:stretch>
+        </p:blipFill>
+        <p:spPr>
+          <a:xfrm>
+            <a:off x="7029450" y="7067550"/>
+            <a:ext cx="1314450" cy="1181100"/>
+          </a:xfrm>
+          <a:prstGeom prst="rect">
+            <a:avLst/>
+          </a:prstGeom>
+        </p:spPr>
+      </p:pic>
+      <p:pic>
+        <p:nvPicPr>
+          <p:cNvPr id="31" name="Icon kalaratri" descr="icon_kalaratri.png"/>
+          <p:cNvPicPr>
+            <a:picLocks noChangeAspect="1"/>
+          </p:cNvPicPr>
+          <p:nvPr/>
+        </p:nvPicPr>
+        <p:blipFill>
+          <a:blip r:embed="rId31"/>
+          <a:stretch>
+            <a:fillRect/>
+          </a:stretch>
+        </p:blipFill>
+        <p:spPr>
+          <a:xfrm>
+            <a:off x="647700" y="8382000"/>
+            <a:ext cx="1381125" cy="1219200"/>
+          </a:xfrm>
+          <a:prstGeom prst="rect">
+            <a:avLst/>
+          </a:prstGeom>
+        </p:spPr>
+      </p:pic>
+      <p:pic>
+        <p:nvPicPr>
+          <p:cNvPr id="32" name="Icon mahagauri" descr="icon_mahagauri.png"/>
+          <p:cNvPicPr>
+            <a:picLocks noChangeAspect="1"/>
+          </p:cNvPicPr>
+          <p:nvPr/>
+        </p:nvPicPr>
+        <p:blipFill>
+          <a:blip r:embed="rId32"/>
+          <a:stretch>
+            <a:fillRect/>
+          </a:stretch>
+        </p:blipFill>
+        <p:spPr>
+          <a:xfrm>
+            <a:off x="3943350" y="8382000"/>
+            <a:ext cx="1238250" cy="1200150"/>
+          </a:xfrm>
+          <a:prstGeom prst="rect">
+            <a:avLst/>
+          </a:prstGeom>
+        </p:spPr>
+      </p:pic>
+      <p:pic>
+        <p:nvPicPr>
+          <p:cNvPr id="33" name="Icon siddhidatri" descr="icon_siddhidatri.png"/>
+          <p:cNvPicPr>
+            <a:picLocks noChangeAspect="1"/>
+          </p:cNvPicPr>
+          <p:nvPr/>
+        </p:nvPicPr>
+        <p:blipFill>
+          <a:blip r:embed="rId33"/>
+          <a:stretch>
+            <a:fillRect/>
+          </a:stretch>
+        </p:blipFill>
+        <p:spPr>
+          <a:xfrm>
+            <a:off x="7153275" y="8382000"/>
+            <a:ext cx="1209675" cy="1209675"/>
+          </a:xfrm>
+          <a:prstGeom prst="rect">
+            <a:avLst/>
+          </a:prstGeom>
+        </p:spPr>
+      </p:pic>
+      <p:pic>
+        <p:nvPicPr>
+          <p:cNvPr id="34" name="Underline 1" descr="underline_1.png"/>
+          <p:cNvPicPr>
+            <a:picLocks noChangeAspect="1"/>
+          </p:cNvPicPr>
+          <p:nvPr/>
+        </p:nvPicPr>
+        <p:blipFill>
+          <a:blip r:embed="rId34"/>
+          <a:stretch>
+            <a:fillRect/>
+          </a:stretch>
+        </p:blipFill>
+        <p:spPr>
+          <a:xfrm>
+            <a:off x="733425" y="10420350"/>
+            <a:ext cx="2857500" cy="28575"/>
+          </a:xfrm>
+          <a:prstGeom prst="rect">
+            <a:avLst/>
+          </a:prstGeom>
+        </p:spPr>
+      </p:pic>
+      <p:pic>
+        <p:nvPicPr>
+          <p:cNvPr id="35" name="Underline 2" descr="underline_2.png"/>
+          <p:cNvPicPr>
+            <a:picLocks noChangeAspect="1"/>
+          </p:cNvPicPr>
+          <p:nvPr/>
+        </p:nvPicPr>
+        <p:blipFill>
+          <a:blip r:embed="rId35"/>
+          <a:stretch>
+            <a:fillRect/>
+          </a:stretch>
+        </p:blipFill>
+        <p:spPr>
+          <a:xfrm>
+            <a:off x="4143375" y="10420350"/>
+            <a:ext cx="2638425" cy="28575"/>
+          </a:xfrm>
+          <a:prstGeom prst="rect">
+            <a:avLst/>
+          </a:prstGeom>
+        </p:spPr>
+      </p:pic>
+      <p:pic>
+        <p:nvPicPr>
+          <p:cNvPr id="36" name="Underline 3" descr="underline_3.png"/>
+          <p:cNvPicPr>
+            <a:picLocks noChangeAspect="1"/>
+          </p:cNvPicPr>
+          <p:nvPr/>
+        </p:nvPicPr>
+        <p:blipFill>
+          <a:blip r:embed="rId36"/>
+          <a:stretch>
+            <a:fillRect/>
+          </a:stretch>
+        </p:blipFill>
+        <p:spPr>
+          <a:xfrm>
+            <a:off x="7467600" y="10429875"/>
+            <a:ext cx="2438400" cy="19050"/>
+          </a:xfrm>
+          <a:prstGeom prst="rect">
+            <a:avLst/>
+          </a:prstGeom>
+        </p:spPr>
+      </p:pic>
+      <p:pic>
+        <p:nvPicPr>
+          <p:cNvPr id="37" name="Bottom vline 1" descr="bottom_vline_1.png"/>
+          <p:cNvPicPr>
+            <a:picLocks noChangeAspect="1"/>
+          </p:cNvPicPr>
+          <p:nvPr/>
+        </p:nvPicPr>
+        <p:blipFill>
+          <a:blip r:embed="rId37"/>
+          <a:stretch>
+            <a:fillRect/>
+          </a:stretch>
+        </p:blipFill>
+        <p:spPr>
+          <a:xfrm>
+            <a:off x="3724275" y="10172700"/>
+            <a:ext cx="228600" cy="2352675"/>
+          </a:xfrm>
+          <a:prstGeom prst="rect">
+            <a:avLst/>
+          </a:prstGeom>
+        </p:spPr>
+      </p:pic>
+      <p:pic>
+        <p:nvPicPr>
+          <p:cNvPr id="38" name="Bottom vline 2" descr="bottom_vline_2.png"/>
+          <p:cNvPicPr>
+            <a:picLocks noChangeAspect="1"/>
+          </p:cNvPicPr>
+          <p:nvPr/>
+        </p:nvPicPr>
+        <p:blipFill>
+          <a:blip r:embed="rId38"/>
+          <a:stretch>
+            <a:fillRect/>
+          </a:stretch>
+        </p:blipFill>
+        <p:spPr>
+          <a:xfrm>
+            <a:off x="6905625" y="10153650"/>
+            <a:ext cx="238125" cy="2343150"/>
+          </a:xfrm>
+          <a:prstGeom prst="rect">
+            <a:avLst/>
+          </a:prstGeom>
+        </p:spPr>
+      </p:pic>
+      <p:pic>
+        <p:nvPicPr>
+          <p:cNvPr id="39" name="Dandiya sticks" descr="icon_dandiya.png"/>
+          <p:cNvPicPr>
+            <a:picLocks noChangeAspect="1"/>
+          </p:cNvPicPr>
+          <p:nvPr/>
+        </p:nvPicPr>
+        <p:blipFill>
+          <a:blip r:embed="rId39"/>
+          <a:stretch>
+            <a:fillRect/>
+          </a:stretch>
+        </p:blipFill>
+        <p:spPr>
+          <a:xfrm>
+            <a:off x="1219200" y="10372725"/>
+            <a:ext cx="1752600" cy="723900"/>
+          </a:xfrm>
+          <a:prstGeom prst="rect">
+            <a:avLst/>
+          </a:prstGeom>
+        </p:spPr>
+      </p:pic>
+      <p:pic>
+        <p:nvPicPr>
+          <p:cNvPr id="40" name="Lotus" descr="icon_lotus_bottom.png"/>
+          <p:cNvPicPr>
+            <a:picLocks noChangeAspect="1"/>
+          </p:cNvPicPr>
+          <p:nvPr/>
+        </p:nvPicPr>
+        <p:blipFill>
+          <a:blip r:embed="rId40"/>
+          <a:stretch>
+            <a:fillRect/>
+          </a:stretch>
+        </p:blipFill>
+        <p:spPr>
+          <a:xfrm>
+            <a:off x="4791075" y="10363200"/>
+            <a:ext cx="1228725" cy="781050"/>
+          </a:xfrm>
+          <a:prstGeom prst="rect">
+            <a:avLst/>
+          </a:prstGeom>
+        </p:spPr>
+      </p:pic>
+      <p:pic>
+        <p:nvPicPr>
+          <p:cNvPr id="41" name="Diya" descr="icon_diya.png"/>
+          <p:cNvPicPr>
+            <a:picLocks noChangeAspect="1"/>
+          </p:cNvPicPr>
+          <p:nvPr/>
+        </p:nvPicPr>
+        <p:blipFill>
+          <a:blip r:embed="rId41"/>
+          <a:stretch>
+            <a:fillRect/>
+          </a:stretch>
+        </p:blipFill>
+        <p:spPr>
+          <a:xfrm>
+            <a:off x="7981950" y="10287000"/>
+            <a:ext cx="1371600" cy="838200"/>
+          </a:xfrm>
+          <a:prstGeom prst="rect">
+            <a:avLst/>
+          </a:prstGeom>
+        </p:spPr>
+      </p:pic>
+      <p:pic>
+        <p:nvPicPr>
+          <p:cNvPr id="42" name="Bottom divider with lotus" descr="bottom_divider.png"/>
+          <p:cNvPicPr>
+            <a:picLocks noChangeAspect="1"/>
+          </p:cNvPicPr>
+          <p:nvPr/>
+        </p:nvPicPr>
+        <p:blipFill>
+          <a:blip r:embed="rId42"/>
+          <a:stretch>
+            <a:fillRect/>
+          </a:stretch>
+        </p:blipFill>
+        <p:spPr>
+          <a:xfrm>
+            <a:off x="3305175" y="12534900"/>
+            <a:ext cx="4067175" cy="400050"/>
+          </a:xfrm>
+          <a:prstGeom prst="rect">
+            <a:avLst/>
+          </a:prstGeom>
+        </p:spPr>
+      </p:pic>
+      <p:sp>
+        <p:nvSpPr>
+          <p:cNvPr id="43" name="Title"/>
+          <p:cNvSpPr txBox="1"/>
+          <p:nvPr/>
+        </p:nvSpPr>
+        <p:spPr>
+          <a:xfrm>
+            <a:off x="1057275" y="1609725"/>
+            <a:ext cx="8572500" cy="1905000"/>
+          </a:xfrm>
+          <a:prstGeom prst="rect">
+            <a:avLst/>
+          </a:prstGeom>
+          <a:noFill/>
+        </p:spPr>
+        <p:txBody>
+          <a:bodyPr wrap="square" lIns="0" rIns="0" tIns="0" bIns="0">
+            <a:spAutoFit/>
+          </a:bodyPr>
+          <a:lstStyle/>
+          <a:p>
+            <a:pPr algn="ctr">
+              <a:lnSpc>
+                <a:spcPct val="100000"/>
+              </a:lnSpc>
+            </a:pPr>
+            <a:r>
+              <a:rPr sz="12750" b="0">
+                <a:solidFill>
+                  <a:srgbClr val="F5E6B3"/>
+                </a:solidFill>
+                <a:latin typeface="DM Serif Display"/>
+              </a:rPr>
+              <a:t>Navratri</a:t>
+            </a:r>
+          </a:p>
+        </p:txBody>
+      </p:sp>
+      <p:sp>
+        <p:nvSpPr>
+          <p:cNvPr id="44" name="Subtitle"/>
+          <p:cNvSpPr txBox="1"/>
+          <p:nvPr/>
+        </p:nvSpPr>
+        <p:spPr>
+          <a:xfrm>
+            <a:off x="1533525" y="3200400"/>
+            <a:ext cx="7620000" cy="476250"/>
+          </a:xfrm>
+          <a:prstGeom prst="rect">
+            <a:avLst/>
+          </a:prstGeom>
+          <a:noFill/>
+        </p:spPr>
+        <p:txBody>
+          <a:bodyPr wrap="square" lIns="0" rIns="0" tIns="0" bIns="0">
+            <a:spAutoFit/>
+          </a:bodyPr>
+          <a:lstStyle/>
+          <a:p>
+            <a:pPr algn="ctr">
+              <a:lnSpc>
+                <a:spcPct val="100000"/>
+              </a:lnSpc>
+            </a:pPr>
+            <a:r>
+              <a:rPr sz="2550" b="0" spc="375">
+                <a:solidFill>
+                  <a:srgbClr val="F5E6B3"/>
+                </a:solidFill>
+                <a:latin typeface="Cormorant Garamond"/>
+              </a:rPr>
+              <a:t>NINE NIGHTS OF DIVINE POWER</a:t>
+            </a:r>
+          </a:p>
+        </p:txBody>
+      </p:sp>
+      <p:sp>
+        <p:nvSpPr>
+          <p:cNvPr id="45" name="Intro paragraph"/>
+          <p:cNvSpPr txBox="1"/>
+          <p:nvPr/>
+        </p:nvSpPr>
+        <p:spPr>
+          <a:xfrm>
+            <a:off x="1343025" y="3790950"/>
+            <a:ext cx="8001000" cy="1143000"/>
+          </a:xfrm>
+          <a:prstGeom prst="rect">
+            <a:avLst/>
+          </a:prstGeom>
+          <a:noFill/>
+        </p:spPr>
+        <p:txBody>
+          <a:bodyPr wrap="square" lIns="0" rIns="0" tIns="0" bIns="0">
+            <a:spAutoFit/>
+          </a:bodyPr>
+          <a:lstStyle/>
+          <a:p>
+            <a:pPr algn="ctr">
+              <a:lnSpc>
+                <a:spcPct val="100000"/>
+              </a:lnSpc>
+            </a:pPr>
+            <a:r>
+              <a:rPr sz="2325" b="1">
+                <a:solidFill>
+                  <a:srgbClr val="F5E6B3"/>
+                </a:solidFill>
+                <a:latin typeface="Times New Roman"/>
+              </a:rPr>
+              <a:t>Navratri is a Hindu festival dedicated to the worship of Goddess Durga. It symbolizes devotion, self-reflection, and the victory of good over evil.</a:t>
+            </a:r>
+          </a:p>
+        </p:txBody>
+      </p:sp>
+      <p:sp>
+        <p:nvSpPr>
+          <p:cNvPr id="46" name="Section title"/>
+          <p:cNvSpPr txBox="1"/>
+          <p:nvPr/>
+        </p:nvSpPr>
+        <p:spPr>
+          <a:xfrm>
+            <a:off x="2047875" y="5067300"/>
+            <a:ext cx="6591300" cy="495300"/>
+          </a:xfrm>
+          <a:prstGeom prst="rect">
+            <a:avLst/>
+          </a:prstGeom>
+          <a:noFill/>
+        </p:spPr>
+        <p:txBody>
+          <a:bodyPr wrap="square" lIns="0" rIns="0" tIns="0" bIns="0">
+            <a:spAutoFit/>
+          </a:bodyPr>
+          <a:lstStyle/>
+          <a:p>
+            <a:pPr algn="ctr">
+              <a:lnSpc>
+                <a:spcPct val="100000"/>
+              </a:lnSpc>
+            </a:pPr>
+            <a:r>
+              <a:rPr sz="3000" b="1">
+                <a:solidFill>
+                  <a:srgbClr val="5A0A14"/>
+                </a:solidFill>
+                <a:latin typeface="Times New Roman"/>
+              </a:rPr>
+              <a:t>The Nine Forms of Navadurga</a:t>
+            </a:r>
+          </a:p>
+        </p:txBody>
+      </p:sp>
+      <p:sp>
+        <p:nvSpPr>
+          <p:cNvPr id="47" name="Form name 1"/>
+          <p:cNvSpPr txBox="1"/>
+          <p:nvPr/>
+        </p:nvSpPr>
+        <p:spPr>
+          <a:xfrm>
+            <a:off x="2019300" y="5848350"/>
+            <a:ext cx="1809750" cy="304800"/>
+          </a:xfrm>
+          <a:prstGeom prst="rect">
+            <a:avLst/>
+          </a:prstGeom>
+          <a:noFill/>
+        </p:spPr>
+        <p:txBody>
+          <a:bodyPr wrap="square" lIns="0" rIns="0" tIns="0" bIns="0">
+            <a:spAutoFit/>
+          </a:bodyPr>
+          <a:lstStyle/>
+          <a:p>
+            <a:pPr algn="ctr">
+              <a:lnSpc>
+                <a:spcPct val="100000"/>
+              </a:lnSpc>
+            </a:pPr>
+            <a:r>
+              <a:rPr sz="1725" b="1">
+                <a:solidFill>
+                  <a:srgbClr val="F5E6B3"/>
+                </a:solidFill>
+                <a:latin typeface="Times New Roman"/>
+              </a:rPr>
+              <a:t>1. Shailaputri</a:t>
+            </a:r>
+          </a:p>
+        </p:txBody>
+      </p:sp>
+      <p:sp>
+        <p:nvSpPr>
+          <p:cNvPr id="48" name="Form meaning 1"/>
+          <p:cNvSpPr txBox="1"/>
+          <p:nvPr/>
+        </p:nvSpPr>
+        <p:spPr>
+          <a:xfrm>
+            <a:off x="2019300" y="6172200"/>
+            <a:ext cx="1809750" cy="571500"/>
+          </a:xfrm>
+          <a:prstGeom prst="rect">
+            <a:avLst/>
+          </a:prstGeom>
+          <a:noFill/>
+        </p:spPr>
+        <p:txBody>
+          <a:bodyPr wrap="square" lIns="0" rIns="0" tIns="0" bIns="0">
+            <a:spAutoFit/>
+          </a:bodyPr>
+          <a:lstStyle/>
+          <a:p>
+            <a:pPr algn="ctr">
+              <a:lnSpc>
+                <a:spcPct val="100000"/>
+              </a:lnSpc>
+            </a:pPr>
+            <a:r>
+              <a:rPr sz="1500" b="1">
+                <a:solidFill>
+                  <a:srgbClr val="FBF3DC"/>
+                </a:solidFill>
+                <a:latin typeface="Open Sans"/>
+              </a:rPr>
+              <a:t>Stability</a:t>
+            </a:r>
+          </a:p>
+          <a:p>
+            <a:pPr algn="ctr">
+              <a:lnSpc>
+                <a:spcPct val="100000"/>
+              </a:lnSpc>
+            </a:pPr>
+            <a:r>
+              <a:rPr sz="1500" b="1">
+                <a:solidFill>
+                  <a:srgbClr val="FBF3DC"/>
+                </a:solidFill>
+                <a:latin typeface="Open Sans"/>
+              </a:rPr>
+              <a:t>and strength</a:t>
+            </a:r>
+          </a:p>
+        </p:txBody>
+      </p:sp>
+      <p:sp>
+        <p:nvSpPr>
+          <p:cNvPr id="49" name="Form name 2"/>
+          <p:cNvSpPr txBox="1"/>
+          <p:nvPr/>
+        </p:nvSpPr>
+        <p:spPr>
+          <a:xfrm>
+            <a:off x="5200650" y="5848350"/>
+            <a:ext cx="1809750" cy="304800"/>
+          </a:xfrm>
+          <a:prstGeom prst="rect">
+            <a:avLst/>
+          </a:prstGeom>
+          <a:noFill/>
+        </p:spPr>
+        <p:txBody>
+          <a:bodyPr wrap="square" lIns="0" rIns="0" tIns="0" bIns="0">
+            <a:spAutoFit/>
+          </a:bodyPr>
+          <a:lstStyle/>
+          <a:p>
+            <a:pPr algn="ctr">
+              <a:lnSpc>
+                <a:spcPct val="100000"/>
+              </a:lnSpc>
+            </a:pPr>
+            <a:r>
+              <a:rPr sz="1725" b="1">
+                <a:solidFill>
+                  <a:srgbClr val="F5E6B3"/>
+                </a:solidFill>
+                <a:latin typeface="Times New Roman"/>
+              </a:rPr>
+              <a:t>2. Brahmacharini</a:t>
+            </a:r>
+          </a:p>
+        </p:txBody>
+      </p:sp>
+      <p:sp>
+        <p:nvSpPr>
+          <p:cNvPr id="50" name="Form meaning 2"/>
+          <p:cNvSpPr txBox="1"/>
+          <p:nvPr/>
+        </p:nvSpPr>
+        <p:spPr>
+          <a:xfrm>
+            <a:off x="5200650" y="6172200"/>
+            <a:ext cx="1809750" cy="571500"/>
+          </a:xfrm>
+          <a:prstGeom prst="rect">
+            <a:avLst/>
+          </a:prstGeom>
+          <a:noFill/>
+        </p:spPr>
+        <p:txBody>
+          <a:bodyPr wrap="square" lIns="0" rIns="0" tIns="0" bIns="0">
+            <a:spAutoFit/>
+          </a:bodyPr>
+          <a:lstStyle/>
+          <a:p>
+            <a:pPr algn="ctr">
+              <a:lnSpc>
+                <a:spcPct val="100000"/>
+              </a:lnSpc>
+            </a:pPr>
+            <a:r>
+              <a:rPr sz="1500" b="1">
+                <a:solidFill>
+                  <a:srgbClr val="FBF3DC"/>
+                </a:solidFill>
+                <a:latin typeface="Open Sans"/>
+              </a:rPr>
+              <a:t>Devotion</a:t>
+            </a:r>
+          </a:p>
+          <a:p>
+            <a:pPr algn="ctr">
+              <a:lnSpc>
+                <a:spcPct val="100000"/>
+              </a:lnSpc>
+            </a:pPr>
+            <a:r>
+              <a:rPr sz="1500" b="1">
+                <a:solidFill>
+                  <a:srgbClr val="FBF3DC"/>
+                </a:solidFill>
+                <a:latin typeface="Open Sans"/>
+              </a:rPr>
+              <a:t>and discipline</a:t>
+            </a:r>
+          </a:p>
+        </p:txBody>
+      </p:sp>
+      <p:sp>
+        <p:nvSpPr>
+          <p:cNvPr id="51" name="Form name 3"/>
+          <p:cNvSpPr txBox="1"/>
+          <p:nvPr/>
+        </p:nvSpPr>
+        <p:spPr>
+          <a:xfrm>
+            <a:off x="8334375" y="5848350"/>
+            <a:ext cx="1809750" cy="304800"/>
+          </a:xfrm>
+          <a:prstGeom prst="rect">
+            <a:avLst/>
+          </a:prstGeom>
+          <a:noFill/>
+        </p:spPr>
+        <p:txBody>
+          <a:bodyPr wrap="square" lIns="0" rIns="0" tIns="0" bIns="0">
+            <a:spAutoFit/>
+          </a:bodyPr>
+          <a:lstStyle/>
+          <a:p>
+            <a:pPr algn="ctr">
+              <a:lnSpc>
+                <a:spcPct val="100000"/>
+              </a:lnSpc>
+            </a:pPr>
+            <a:r>
+              <a:rPr sz="1725" b="1">
+                <a:solidFill>
+                  <a:srgbClr val="F5E6B3"/>
+                </a:solidFill>
+                <a:latin typeface="Times New Roman"/>
+              </a:rPr>
+              <a:t>3. Chandraghanta</a:t>
+            </a:r>
+          </a:p>
+        </p:txBody>
+      </p:sp>
+      <p:sp>
+        <p:nvSpPr>
+          <p:cNvPr id="52" name="Form meaning 3"/>
+          <p:cNvSpPr txBox="1"/>
+          <p:nvPr/>
+        </p:nvSpPr>
+        <p:spPr>
+          <a:xfrm>
+            <a:off x="8334375" y="6172200"/>
+            <a:ext cx="1809750" cy="571500"/>
+          </a:xfrm>
+          <a:prstGeom prst="rect">
+            <a:avLst/>
+          </a:prstGeom>
+          <a:noFill/>
+        </p:spPr>
+        <p:txBody>
+          <a:bodyPr wrap="square" lIns="0" rIns="0" tIns="0" bIns="0">
+            <a:spAutoFit/>
+          </a:bodyPr>
+          <a:lstStyle/>
+          <a:p>
+            <a:pPr algn="ctr">
+              <a:lnSpc>
+                <a:spcPct val="100000"/>
+              </a:lnSpc>
+            </a:pPr>
+            <a:r>
+              <a:rPr sz="1500" b="1">
+                <a:solidFill>
+                  <a:srgbClr val="FBF3DC"/>
+                </a:solidFill>
+                <a:latin typeface="Open Sans"/>
+              </a:rPr>
+              <a:t>Courage</a:t>
+            </a:r>
+          </a:p>
+          <a:p>
+            <a:pPr algn="ctr">
+              <a:lnSpc>
+                <a:spcPct val="100000"/>
+              </a:lnSpc>
+            </a:pPr>
+            <a:r>
+              <a:rPr sz="1500" b="1">
+                <a:solidFill>
+                  <a:srgbClr val="FBF3DC"/>
+                </a:solidFill>
+                <a:latin typeface="Open Sans"/>
+              </a:rPr>
+              <a:t>and fearlessness</a:t>
+            </a:r>
+          </a:p>
+        </p:txBody>
+      </p:sp>
+      <p:sp>
+        <p:nvSpPr>
+          <p:cNvPr id="53" name="Form name 4"/>
+          <p:cNvSpPr txBox="1"/>
+          <p:nvPr/>
+        </p:nvSpPr>
+        <p:spPr>
+          <a:xfrm>
+            <a:off x="2019300" y="7153275"/>
+            <a:ext cx="1809750" cy="304800"/>
+          </a:xfrm>
+          <a:prstGeom prst="rect">
+            <a:avLst/>
+          </a:prstGeom>
+          <a:noFill/>
+        </p:spPr>
+        <p:txBody>
+          <a:bodyPr wrap="square" lIns="0" rIns="0" tIns="0" bIns="0">
+            <a:spAutoFit/>
+          </a:bodyPr>
+          <a:lstStyle/>
+          <a:p>
+            <a:pPr algn="ctr">
+              <a:lnSpc>
+                <a:spcPct val="100000"/>
+              </a:lnSpc>
+            </a:pPr>
+            <a:r>
+              <a:rPr sz="1725" b="1">
+                <a:solidFill>
+                  <a:srgbClr val="F5E6B3"/>
+                </a:solidFill>
+                <a:latin typeface="Times New Roman"/>
+              </a:rPr>
+              <a:t>4. Kushmanda</a:t>
+            </a:r>
+          </a:p>
+        </p:txBody>
+      </p:sp>
+      <p:sp>
+        <p:nvSpPr>
+          <p:cNvPr id="54" name="Form meaning 4"/>
+          <p:cNvSpPr txBox="1"/>
+          <p:nvPr/>
+        </p:nvSpPr>
+        <p:spPr>
+          <a:xfrm>
+            <a:off x="2019300" y="7486650"/>
+            <a:ext cx="1809750" cy="571500"/>
+          </a:xfrm>
+          <a:prstGeom prst="rect">
+            <a:avLst/>
+          </a:prstGeom>
+          <a:noFill/>
+        </p:spPr>
+        <p:txBody>
+          <a:bodyPr wrap="square" lIns="0" rIns="0" tIns="0" bIns="0">
+            <a:spAutoFit/>
+          </a:bodyPr>
+          <a:lstStyle/>
+          <a:p>
+            <a:pPr algn="ctr">
+              <a:lnSpc>
+                <a:spcPct val="100000"/>
+              </a:lnSpc>
+            </a:pPr>
+            <a:r>
+              <a:rPr sz="1500" b="1">
+                <a:solidFill>
+                  <a:srgbClr val="FBF3DC"/>
+                </a:solidFill>
+                <a:latin typeface="Open Sans"/>
+              </a:rPr>
+              <a:t>Creativity</a:t>
+            </a:r>
+          </a:p>
+          <a:p>
+            <a:pPr algn="ctr">
+              <a:lnSpc>
+                <a:spcPct val="100000"/>
+              </a:lnSpc>
+            </a:pPr>
+            <a:r>
+              <a:rPr sz="1500" b="1">
+                <a:solidFill>
+                  <a:srgbClr val="FBF3DC"/>
+                </a:solidFill>
+                <a:latin typeface="Open Sans"/>
+              </a:rPr>
+              <a:t>and energy</a:t>
+            </a:r>
+          </a:p>
+        </p:txBody>
+      </p:sp>
+      <p:sp>
+        <p:nvSpPr>
+          <p:cNvPr id="55" name="Form name 5"/>
+          <p:cNvSpPr txBox="1"/>
+          <p:nvPr/>
+        </p:nvSpPr>
+        <p:spPr>
+          <a:xfrm>
+            <a:off x="5200650" y="7153275"/>
+            <a:ext cx="1809750" cy="304800"/>
+          </a:xfrm>
+          <a:prstGeom prst="rect">
+            <a:avLst/>
+          </a:prstGeom>
+          <a:noFill/>
+        </p:spPr>
+        <p:txBody>
+          <a:bodyPr wrap="square" lIns="0" rIns="0" tIns="0" bIns="0">
+            <a:spAutoFit/>
+          </a:bodyPr>
+          <a:lstStyle/>
+          <a:p>
+            <a:pPr algn="ctr">
+              <a:lnSpc>
+                <a:spcPct val="100000"/>
+              </a:lnSpc>
+            </a:pPr>
+            <a:r>
+              <a:rPr sz="1725" b="1">
+                <a:solidFill>
+                  <a:srgbClr val="F5E6B3"/>
+                </a:solidFill>
+                <a:latin typeface="Times New Roman"/>
+              </a:rPr>
+              <a:t>5. Skandamata</a:t>
+            </a:r>
+          </a:p>
+        </p:txBody>
+      </p:sp>
+      <p:sp>
+        <p:nvSpPr>
+          <p:cNvPr id="56" name="Form meaning 5"/>
+          <p:cNvSpPr txBox="1"/>
+          <p:nvPr/>
+        </p:nvSpPr>
+        <p:spPr>
+          <a:xfrm>
+            <a:off x="5200650" y="7486650"/>
+            <a:ext cx="1809750" cy="571500"/>
+          </a:xfrm>
+          <a:prstGeom prst="rect">
+            <a:avLst/>
+          </a:prstGeom>
+          <a:noFill/>
+        </p:spPr>
+        <p:txBody>
+          <a:bodyPr wrap="square" lIns="0" rIns="0" tIns="0" bIns="0">
+            <a:spAutoFit/>
+          </a:bodyPr>
+          <a:lstStyle/>
+          <a:p>
+            <a:pPr algn="ctr">
+              <a:lnSpc>
+                <a:spcPct val="100000"/>
+              </a:lnSpc>
+            </a:pPr>
+            <a:r>
+              <a:rPr sz="1500" b="1">
+                <a:solidFill>
+                  <a:srgbClr val="FBF3DC"/>
+                </a:solidFill>
+                <a:latin typeface="Open Sans"/>
+              </a:rPr>
+              <a:t>Love</a:t>
+            </a:r>
+          </a:p>
+          <a:p>
+            <a:pPr algn="ctr">
+              <a:lnSpc>
+                <a:spcPct val="100000"/>
+              </a:lnSpc>
+            </a:pPr>
+            <a:r>
+              <a:rPr sz="1500" b="1">
+                <a:solidFill>
+                  <a:srgbClr val="FBF3DC"/>
+                </a:solidFill>
+                <a:latin typeface="Open Sans"/>
+              </a:rPr>
+              <a:t>and protection</a:t>
+            </a:r>
+          </a:p>
+        </p:txBody>
+      </p:sp>
+      <p:sp>
+        <p:nvSpPr>
+          <p:cNvPr id="57" name="Form name 6"/>
+          <p:cNvSpPr txBox="1"/>
+          <p:nvPr/>
+        </p:nvSpPr>
+        <p:spPr>
+          <a:xfrm>
+            <a:off x="8334375" y="7153275"/>
+            <a:ext cx="1809750" cy="304800"/>
+          </a:xfrm>
+          <a:prstGeom prst="rect">
+            <a:avLst/>
+          </a:prstGeom>
+          <a:noFill/>
+        </p:spPr>
+        <p:txBody>
+          <a:bodyPr wrap="square" lIns="0" rIns="0" tIns="0" bIns="0">
+            <a:spAutoFit/>
+          </a:bodyPr>
+          <a:lstStyle/>
+          <a:p>
+            <a:pPr algn="ctr">
+              <a:lnSpc>
+                <a:spcPct val="100000"/>
+              </a:lnSpc>
+            </a:pPr>
+            <a:r>
+              <a:rPr sz="1725" b="1">
+                <a:solidFill>
+                  <a:srgbClr val="F5E6B3"/>
+                </a:solidFill>
+                <a:latin typeface="Times New Roman"/>
+              </a:rPr>
+              <a:t>6. Katyayani</a:t>
+            </a:r>
+          </a:p>
+        </p:txBody>
+      </p:sp>
+      <p:sp>
+        <p:nvSpPr>
+          <p:cNvPr id="58" name="Form meaning 6"/>
+          <p:cNvSpPr txBox="1"/>
+          <p:nvPr/>
+        </p:nvSpPr>
+        <p:spPr>
+          <a:xfrm>
+            <a:off x="8334375" y="7486650"/>
+            <a:ext cx="1809750" cy="571500"/>
+          </a:xfrm>
+          <a:prstGeom prst="rect">
+            <a:avLst/>
+          </a:prstGeom>
+          <a:noFill/>
+        </p:spPr>
+        <p:txBody>
+          <a:bodyPr wrap="square" lIns="0" rIns="0" tIns="0" bIns="0">
+            <a:spAutoFit/>
+          </a:bodyPr>
+          <a:lstStyle/>
+          <a:p>
+            <a:pPr algn="ctr">
+              <a:lnSpc>
+                <a:spcPct val="100000"/>
+              </a:lnSpc>
+            </a:pPr>
+            <a:r>
+              <a:rPr sz="1500" b="1">
+                <a:solidFill>
+                  <a:srgbClr val="FBF3DC"/>
+                </a:solidFill>
+                <a:latin typeface="Open Sans"/>
+              </a:rPr>
+              <a:t>Righteousness</a:t>
+            </a:r>
+          </a:p>
+          <a:p>
+            <a:pPr algn="ctr">
+              <a:lnSpc>
+                <a:spcPct val="100000"/>
+              </a:lnSpc>
+            </a:pPr>
+            <a:r>
+              <a:rPr sz="1500" b="1">
+                <a:solidFill>
+                  <a:srgbClr val="FBF3DC"/>
+                </a:solidFill>
+                <a:latin typeface="Open Sans"/>
+              </a:rPr>
+              <a:t>and justice</a:t>
+            </a:r>
+          </a:p>
+        </p:txBody>
+      </p:sp>
+      <p:sp>
+        <p:nvSpPr>
+          <p:cNvPr id="59" name="Form name 7"/>
+          <p:cNvSpPr txBox="1"/>
+          <p:nvPr/>
+        </p:nvSpPr>
+        <p:spPr>
+          <a:xfrm>
+            <a:off x="2019300" y="8467725"/>
+            <a:ext cx="1809750" cy="304800"/>
+          </a:xfrm>
+          <a:prstGeom prst="rect">
+            <a:avLst/>
+          </a:prstGeom>
+          <a:noFill/>
+        </p:spPr>
+        <p:txBody>
+          <a:bodyPr wrap="square" lIns="0" rIns="0" tIns="0" bIns="0">
+            <a:spAutoFit/>
+          </a:bodyPr>
+          <a:lstStyle/>
+          <a:p>
+            <a:pPr algn="ctr">
+              <a:lnSpc>
+                <a:spcPct val="100000"/>
+              </a:lnSpc>
+            </a:pPr>
+            <a:r>
+              <a:rPr sz="1725" b="1">
+                <a:solidFill>
+                  <a:srgbClr val="F5E6B3"/>
+                </a:solidFill>
+                <a:latin typeface="Times New Roman"/>
+              </a:rPr>
+              <a:t>7. Kalaratri</a:t>
+            </a:r>
+          </a:p>
+        </p:txBody>
+      </p:sp>
+      <p:sp>
+        <p:nvSpPr>
+          <p:cNvPr id="60" name="Form meaning 7"/>
+          <p:cNvSpPr txBox="1"/>
+          <p:nvPr/>
+        </p:nvSpPr>
+        <p:spPr>
+          <a:xfrm>
+            <a:off x="2019300" y="8839200"/>
+            <a:ext cx="1809750" cy="571500"/>
+          </a:xfrm>
+          <a:prstGeom prst="rect">
+            <a:avLst/>
+          </a:prstGeom>
+          <a:noFill/>
+        </p:spPr>
+        <p:txBody>
+          <a:bodyPr wrap="square" lIns="0" rIns="0" tIns="0" bIns="0">
+            <a:spAutoFit/>
+          </a:bodyPr>
+          <a:lstStyle/>
+          <a:p>
+            <a:pPr algn="ctr">
+              <a:lnSpc>
+                <a:spcPct val="100000"/>
+              </a:lnSpc>
+            </a:pPr>
+            <a:r>
+              <a:rPr sz="1500" b="1">
+                <a:solidFill>
+                  <a:srgbClr val="FBF3DC"/>
+                </a:solidFill>
+                <a:latin typeface="Open Sans"/>
+              </a:rPr>
+              <a:t>Destruction</a:t>
+            </a:r>
+          </a:p>
+          <a:p>
+            <a:pPr algn="ctr">
+              <a:lnSpc>
+                <a:spcPct val="100000"/>
+              </a:lnSpc>
+            </a:pPr>
+            <a:r>
+              <a:rPr sz="1500" b="1">
+                <a:solidFill>
+                  <a:srgbClr val="FBF3DC"/>
+                </a:solidFill>
+                <a:latin typeface="Open Sans"/>
+              </a:rPr>
+              <a:t>of negativity</a:t>
+            </a:r>
+          </a:p>
+        </p:txBody>
+      </p:sp>
+      <p:sp>
+        <p:nvSpPr>
+          <p:cNvPr id="61" name="Form name 8"/>
+          <p:cNvSpPr txBox="1"/>
+          <p:nvPr/>
+        </p:nvSpPr>
+        <p:spPr>
+          <a:xfrm>
+            <a:off x="5200650" y="8467725"/>
+            <a:ext cx="1809750" cy="304800"/>
+          </a:xfrm>
+          <a:prstGeom prst="rect">
+            <a:avLst/>
+          </a:prstGeom>
+          <a:noFill/>
+        </p:spPr>
+        <p:txBody>
+          <a:bodyPr wrap="square" lIns="0" rIns="0" tIns="0" bIns="0">
+            <a:spAutoFit/>
+          </a:bodyPr>
+          <a:lstStyle/>
+          <a:p>
+            <a:pPr algn="ctr">
+              <a:lnSpc>
+                <a:spcPct val="100000"/>
+              </a:lnSpc>
+            </a:pPr>
+            <a:r>
+              <a:rPr sz="1725" b="1">
+                <a:solidFill>
+                  <a:srgbClr val="F5E6B3"/>
+                </a:solidFill>
+                <a:latin typeface="Times New Roman"/>
+              </a:rPr>
+              <a:t>8. Mahagauri</a:t>
+            </a:r>
+          </a:p>
+        </p:txBody>
+      </p:sp>
+      <p:sp>
+        <p:nvSpPr>
+          <p:cNvPr id="62" name="Form meaning 8"/>
+          <p:cNvSpPr txBox="1"/>
+          <p:nvPr/>
+        </p:nvSpPr>
+        <p:spPr>
+          <a:xfrm>
+            <a:off x="5200650" y="8839200"/>
+            <a:ext cx="1809750" cy="571500"/>
+          </a:xfrm>
+          <a:prstGeom prst="rect">
+            <a:avLst/>
+          </a:prstGeom>
+          <a:noFill/>
+        </p:spPr>
+        <p:txBody>
+          <a:bodyPr wrap="square" lIns="0" rIns="0" tIns="0" bIns="0">
+            <a:spAutoFit/>
+          </a:bodyPr>
+          <a:lstStyle/>
+          <a:p>
+            <a:pPr algn="ctr">
+              <a:lnSpc>
+                <a:spcPct val="100000"/>
+              </a:lnSpc>
+            </a:pPr>
+            <a:r>
+              <a:rPr sz="1500" b="1">
+                <a:solidFill>
+                  <a:srgbClr val="FBF3DC"/>
+                </a:solidFill>
+                <a:latin typeface="Open Sans"/>
+              </a:rPr>
+              <a:t>Purity</a:t>
+            </a:r>
+          </a:p>
+          <a:p>
+            <a:pPr algn="ctr">
+              <a:lnSpc>
+                <a:spcPct val="100000"/>
+              </a:lnSpc>
+            </a:pPr>
+            <a:r>
+              <a:rPr sz="1500" b="1">
+                <a:solidFill>
+                  <a:srgbClr val="FBF3DC"/>
+                </a:solidFill>
+                <a:latin typeface="Open Sans"/>
+              </a:rPr>
+              <a:t>and peace</a:t>
+            </a:r>
+          </a:p>
+        </p:txBody>
+      </p:sp>
+      <p:sp>
+        <p:nvSpPr>
+          <p:cNvPr id="63" name="Form name 9"/>
+          <p:cNvSpPr txBox="1"/>
+          <p:nvPr/>
+        </p:nvSpPr>
+        <p:spPr>
+          <a:xfrm>
+            <a:off x="8334375" y="8467725"/>
+            <a:ext cx="1809750" cy="304800"/>
+          </a:xfrm>
+          <a:prstGeom prst="rect">
+            <a:avLst/>
+          </a:prstGeom>
+          <a:noFill/>
+        </p:spPr>
+        <p:txBody>
+          <a:bodyPr wrap="square" lIns="0" rIns="0" tIns="0" bIns="0">
+            <a:spAutoFit/>
+          </a:bodyPr>
+          <a:lstStyle/>
+          <a:p>
+            <a:pPr algn="ctr">
+              <a:lnSpc>
+                <a:spcPct val="100000"/>
+              </a:lnSpc>
+            </a:pPr>
+            <a:r>
+              <a:rPr sz="1725" b="1">
+                <a:solidFill>
+                  <a:srgbClr val="F5E6B3"/>
+                </a:solidFill>
+                <a:latin typeface="Times New Roman"/>
+              </a:rPr>
+              <a:t>9. Siddhidatri</a:t>
+            </a:r>
+          </a:p>
+        </p:txBody>
+      </p:sp>
+      <p:sp>
+        <p:nvSpPr>
+          <p:cNvPr id="64" name="Form meaning 9"/>
+          <p:cNvSpPr txBox="1"/>
+          <p:nvPr/>
+        </p:nvSpPr>
+        <p:spPr>
+          <a:xfrm>
+            <a:off x="8334375" y="8839200"/>
+            <a:ext cx="1809750" cy="571500"/>
+          </a:xfrm>
+          <a:prstGeom prst="rect">
+            <a:avLst/>
+          </a:prstGeom>
+          <a:noFill/>
+        </p:spPr>
+        <p:txBody>
+          <a:bodyPr wrap="square" lIns="0" rIns="0" tIns="0" bIns="0">
+            <a:spAutoFit/>
+          </a:bodyPr>
+          <a:lstStyle/>
+          <a:p>
+            <a:pPr algn="ctr">
+              <a:lnSpc>
+                <a:spcPct val="100000"/>
+              </a:lnSpc>
+            </a:pPr>
+            <a:r>
+              <a:rPr sz="1500" b="1">
+                <a:solidFill>
+                  <a:srgbClr val="FBF3DC"/>
+                </a:solidFill>
+                <a:latin typeface="Open Sans"/>
+              </a:rPr>
+              <a:t>Wisdom</a:t>
+            </a:r>
+          </a:p>
+          <a:p>
+            <a:pPr algn="ctr">
+              <a:lnSpc>
+                <a:spcPct val="100000"/>
+              </a:lnSpc>
+            </a:pPr>
+            <a:r>
+              <a:rPr sz="1500" b="1">
+                <a:solidFill>
+                  <a:srgbClr val="FBF3DC"/>
+                </a:solidFill>
+                <a:latin typeface="Open Sans"/>
+              </a:rPr>
+              <a:t>and fulfillment</a:t>
+            </a:r>
+          </a:p>
+        </p:txBody>
+      </p:sp>
+      <p:sp>
+        <p:nvSpPr>
+          <p:cNvPr id="65" name="Heading: How It Is Celebrated"/>
+          <p:cNvSpPr txBox="1"/>
+          <p:nvPr/>
+        </p:nvSpPr>
+        <p:spPr>
+          <a:xfrm>
+            <a:off x="638175" y="9925050"/>
+            <a:ext cx="3143250" cy="381000"/>
+          </a:xfrm>
+          <a:prstGeom prst="rect">
+            <a:avLst/>
+          </a:prstGeom>
+          <a:noFill/>
+        </p:spPr>
+        <p:txBody>
+          <a:bodyPr wrap="square" lIns="0" rIns="0" tIns="0" bIns="0">
+            <a:spAutoFit/>
+          </a:bodyPr>
+          <a:lstStyle/>
+          <a:p>
+            <a:pPr algn="ctr">
+              <a:lnSpc>
+                <a:spcPct val="100000"/>
+              </a:lnSpc>
+            </a:pPr>
+            <a:r>
+              <a:rPr sz="2325" b="1">
+                <a:solidFill>
+                  <a:srgbClr val="F5E6B3"/>
+                </a:solidFill>
+                <a:latin typeface="Times New Roman"/>
+              </a:rPr>
+              <a:t>How It Is Celebrated</a:t>
+            </a:r>
+          </a:p>
+        </p:txBody>
+      </p:sp>
+      <p:sp>
+        <p:nvSpPr>
+          <p:cNvPr id="66" name="Body: How It Is Celebrated"/>
+          <p:cNvSpPr txBox="1"/>
+          <p:nvPr/>
+        </p:nvSpPr>
+        <p:spPr>
+          <a:xfrm>
+            <a:off x="781050" y="11087100"/>
+            <a:ext cx="2857500" cy="1524000"/>
+          </a:xfrm>
+          <a:prstGeom prst="rect">
+            <a:avLst/>
+          </a:prstGeom>
+          <a:noFill/>
+        </p:spPr>
+        <p:txBody>
+          <a:bodyPr wrap="square" lIns="0" rIns="0" tIns="0" bIns="0">
+            <a:spAutoFit/>
+          </a:bodyPr>
+          <a:lstStyle/>
+          <a:p>
+            <a:pPr algn="ctr">
+              <a:lnSpc>
+                <a:spcPct val="95000"/>
+              </a:lnSpc>
+            </a:pPr>
+            <a:r>
+              <a:rPr sz="1650" b="1">
+                <a:solidFill>
+                  <a:srgbClr val="FBF3DC"/>
+                </a:solidFill>
+                <a:latin typeface="Open Sans"/>
+              </a:rPr>
+              <a:t>Prayer, fasting,</a:t>
+            </a:r>
+          </a:p>
+          <a:p>
+            <a:pPr algn="ctr">
+              <a:lnSpc>
+                <a:spcPct val="95000"/>
+              </a:lnSpc>
+            </a:pPr>
+            <a:r>
+              <a:rPr sz="1650" b="1">
+                <a:solidFill>
+                  <a:srgbClr val="FBF3DC"/>
+                </a:solidFill>
+                <a:latin typeface="Open Sans"/>
+              </a:rPr>
+              <a:t>Garba and Dandiya, and</a:t>
+            </a:r>
+          </a:p>
+          <a:p>
+            <a:pPr algn="ctr">
+              <a:lnSpc>
+                <a:spcPct val="95000"/>
+              </a:lnSpc>
+            </a:pPr>
+            <a:r>
+              <a:rPr sz="1650" b="1">
+                <a:solidFill>
+                  <a:srgbClr val="FBF3DC"/>
+                </a:solidFill>
+                <a:latin typeface="Open Sans"/>
+              </a:rPr>
+              <a:t>community gatherings</a:t>
+            </a:r>
+          </a:p>
+          <a:p>
+            <a:pPr algn="ctr">
+              <a:lnSpc>
+                <a:spcPct val="95000"/>
+              </a:lnSpc>
+            </a:pPr>
+            <a:r>
+              <a:rPr sz="1650" b="1">
+                <a:solidFill>
+                  <a:srgbClr val="FBF3DC"/>
+                </a:solidFill>
+                <a:latin typeface="Open Sans"/>
+              </a:rPr>
+              <a:t>with joy and devotion.</a:t>
+            </a:r>
+          </a:p>
+        </p:txBody>
+      </p:sp>
+      <p:sp>
+        <p:nvSpPr>
+          <p:cNvPr id="67" name="Heading: Who Is Worshipped"/>
+          <p:cNvSpPr txBox="1"/>
+          <p:nvPr/>
+        </p:nvSpPr>
+        <p:spPr>
+          <a:xfrm>
+            <a:off x="3867150" y="9925050"/>
+            <a:ext cx="3143250" cy="381000"/>
+          </a:xfrm>
+          <a:prstGeom prst="rect">
+            <a:avLst/>
+          </a:prstGeom>
+          <a:noFill/>
+        </p:spPr>
+        <p:txBody>
+          <a:bodyPr wrap="square" lIns="0" rIns="0" tIns="0" bIns="0">
+            <a:spAutoFit/>
+          </a:bodyPr>
+          <a:lstStyle/>
+          <a:p>
+            <a:pPr algn="ctr">
+              <a:lnSpc>
+                <a:spcPct val="100000"/>
+              </a:lnSpc>
+            </a:pPr>
+            <a:r>
+              <a:rPr sz="2325" b="1">
+                <a:solidFill>
+                  <a:srgbClr val="F5E6B3"/>
+                </a:solidFill>
+                <a:latin typeface="Times New Roman"/>
+              </a:rPr>
+              <a:t>Who Is Worshipped</a:t>
+            </a:r>
+          </a:p>
+        </p:txBody>
+      </p:sp>
+      <p:sp>
+        <p:nvSpPr>
+          <p:cNvPr id="68" name="Body: Who Is Worshipped"/>
+          <p:cNvSpPr txBox="1"/>
+          <p:nvPr/>
+        </p:nvSpPr>
+        <p:spPr>
+          <a:xfrm>
+            <a:off x="4010025" y="11163300"/>
+            <a:ext cx="2857500" cy="1524000"/>
+          </a:xfrm>
+          <a:prstGeom prst="rect">
+            <a:avLst/>
+          </a:prstGeom>
+          <a:noFill/>
+        </p:spPr>
+        <p:txBody>
+          <a:bodyPr wrap="square" lIns="0" rIns="0" tIns="0" bIns="0">
+            <a:spAutoFit/>
+          </a:bodyPr>
+          <a:lstStyle/>
+          <a:p>
+            <a:pPr algn="ctr">
+              <a:lnSpc>
+                <a:spcPct val="95000"/>
+              </a:lnSpc>
+            </a:pPr>
+            <a:r>
+              <a:rPr sz="1650" b="1">
+                <a:solidFill>
+                  <a:srgbClr val="FBF3DC"/>
+                </a:solidFill>
+                <a:latin typeface="Open Sans"/>
+              </a:rPr>
+              <a:t>Goddess Durga,</a:t>
+            </a:r>
+          </a:p>
+          <a:p>
+            <a:pPr algn="ctr">
+              <a:lnSpc>
+                <a:spcPct val="95000"/>
+              </a:lnSpc>
+            </a:pPr>
+            <a:r>
+              <a:rPr sz="1650" b="1">
+                <a:solidFill>
+                  <a:srgbClr val="FBF3DC"/>
+                </a:solidFill>
+                <a:latin typeface="Open Sans"/>
+              </a:rPr>
+              <a:t>the Divine Mother, is</a:t>
+            </a:r>
+          </a:p>
+          <a:p>
+            <a:pPr algn="ctr">
+              <a:lnSpc>
+                <a:spcPct val="95000"/>
+              </a:lnSpc>
+            </a:pPr>
+            <a:r>
+              <a:rPr sz="1650" b="1">
+                <a:solidFill>
+                  <a:srgbClr val="FBF3DC"/>
+                </a:solidFill>
+                <a:latin typeface="Open Sans"/>
+              </a:rPr>
+              <a:t>worshipped in her nine</a:t>
+            </a:r>
+          </a:p>
+          <a:p>
+            <a:pPr algn="ctr">
+              <a:lnSpc>
+                <a:spcPct val="95000"/>
+              </a:lnSpc>
+            </a:pPr>
+            <a:r>
+              <a:rPr sz="1650" b="1">
+                <a:solidFill>
+                  <a:srgbClr val="FBF3DC"/>
+                </a:solidFill>
+                <a:latin typeface="Open Sans"/>
+              </a:rPr>
+              <a:t>forms (Navadurga).</a:t>
+            </a:r>
+          </a:p>
+        </p:txBody>
+      </p:sp>
+      <p:sp>
+        <p:nvSpPr>
+          <p:cNvPr id="69" name="Heading: What It Means"/>
+          <p:cNvSpPr txBox="1"/>
+          <p:nvPr/>
+        </p:nvSpPr>
+        <p:spPr>
+          <a:xfrm>
+            <a:off x="7105650" y="9925050"/>
+            <a:ext cx="3143250" cy="381000"/>
+          </a:xfrm>
+          <a:prstGeom prst="rect">
+            <a:avLst/>
+          </a:prstGeom>
+          <a:noFill/>
+        </p:spPr>
+        <p:txBody>
+          <a:bodyPr wrap="square" lIns="0" rIns="0" tIns="0" bIns="0">
+            <a:spAutoFit/>
+          </a:bodyPr>
+          <a:lstStyle/>
+          <a:p>
+            <a:pPr algn="ctr">
+              <a:lnSpc>
+                <a:spcPct val="100000"/>
+              </a:lnSpc>
+            </a:pPr>
+            <a:r>
+              <a:rPr sz="2325" b="1">
+                <a:solidFill>
+                  <a:srgbClr val="F5E6B3"/>
+                </a:solidFill>
+                <a:latin typeface="Times New Roman"/>
+              </a:rPr>
+              <a:t>What It Means</a:t>
+            </a:r>
+          </a:p>
+        </p:txBody>
+      </p:sp>
+      <p:sp>
+        <p:nvSpPr>
+          <p:cNvPr id="70" name="Body: What It Means"/>
+          <p:cNvSpPr txBox="1"/>
+          <p:nvPr/>
+        </p:nvSpPr>
+        <p:spPr>
+          <a:xfrm>
+            <a:off x="7248525" y="11087100"/>
+            <a:ext cx="2857500" cy="1524000"/>
+          </a:xfrm>
+          <a:prstGeom prst="rect">
+            <a:avLst/>
+          </a:prstGeom>
+          <a:noFill/>
+        </p:spPr>
+        <p:txBody>
+          <a:bodyPr wrap="square" lIns="0" rIns="0" tIns="0" bIns="0">
+            <a:spAutoFit/>
+          </a:bodyPr>
+          <a:lstStyle/>
+          <a:p>
+            <a:pPr algn="ctr">
+              <a:lnSpc>
+                <a:spcPct val="95000"/>
+              </a:lnSpc>
+            </a:pPr>
+            <a:r>
+              <a:rPr sz="1650" b="1">
+                <a:solidFill>
+                  <a:srgbClr val="FBF3DC"/>
+                </a:solidFill>
+                <a:latin typeface="Open Sans"/>
+              </a:rPr>
+              <a:t>Navratri reminds us to</a:t>
+            </a:r>
+          </a:p>
+          <a:p>
+            <a:pPr algn="ctr">
+              <a:lnSpc>
+                <a:spcPct val="95000"/>
+              </a:lnSpc>
+            </a:pPr>
+            <a:r>
+              <a:rPr sz="1650" b="1">
+                <a:solidFill>
+                  <a:srgbClr val="FBF3DC"/>
+                </a:solidFill>
+                <a:latin typeface="Open Sans"/>
+              </a:rPr>
+              <a:t>overcome negativity,</a:t>
+            </a:r>
+          </a:p>
+          <a:p>
+            <a:pPr algn="ctr">
+              <a:lnSpc>
+                <a:spcPct val="95000"/>
+              </a:lnSpc>
+            </a:pPr>
+            <a:r>
+              <a:rPr sz="1650" b="1">
+                <a:solidFill>
+                  <a:srgbClr val="FBF3DC"/>
+                </a:solidFill>
+                <a:latin typeface="Open Sans"/>
+              </a:rPr>
+              <a:t>cultivate inner strength,</a:t>
+            </a:r>
+          </a:p>
+          <a:p>
+            <a:pPr algn="ctr">
+              <a:lnSpc>
+                <a:spcPct val="95000"/>
+              </a:lnSpc>
+            </a:pPr>
+            <a:r>
+              <a:rPr sz="1650" b="1">
+                <a:solidFill>
+                  <a:srgbClr val="FBF3DC"/>
+                </a:solidFill>
+                <a:latin typeface="Open Sans"/>
+              </a:rPr>
+              <a:t>and embrace new</a:t>
+            </a:r>
+          </a:p>
+          <a:p>
+            <a:pPr algn="ctr">
+              <a:lnSpc>
+                <a:spcPct val="95000"/>
+              </a:lnSpc>
+            </a:pPr>
+            <a:r>
+              <a:rPr sz="1650" b="1">
+                <a:solidFill>
+                  <a:srgbClr val="FBF3DC"/>
+                </a:solidFill>
+                <a:latin typeface="Open Sans"/>
+              </a:rPr>
+              <a:t>beginnings.</a:t>
+            </a:r>
+          </a:p>
+        </p:txBody>
+      </p:sp>
     </p:spTree>
   </p:cSld>
   <p:clrMapOvr>
